--- a/Final Presentation.pptx
+++ b/Final Presentation.pptx
@@ -5,7 +5,7 @@
     <p:sldMasterId id="2147483704" r:id="rId1"/>
   </p:sldMasterIdLst>
   <p:notesMasterIdLst>
-    <p:notesMasterId r:id="rId10"/>
+    <p:notesMasterId r:id="rId14"/>
   </p:notesMasterIdLst>
   <p:sldIdLst>
     <p:sldId id="256" r:id="rId2"/>
@@ -15,32 +15,36 @@
     <p:sldId id="349" r:id="rId6"/>
     <p:sldId id="350" r:id="rId7"/>
     <p:sldId id="355" r:id="rId8"/>
-    <p:sldId id="265" r:id="rId9"/>
+    <p:sldId id="358" r:id="rId9"/>
+    <p:sldId id="360" r:id="rId10"/>
+    <p:sldId id="361" r:id="rId11"/>
+    <p:sldId id="359" r:id="rId12"/>
+    <p:sldId id="265" r:id="rId13"/>
   </p:sldIdLst>
   <p:sldSz cx="9144000" cy="5143500" type="screen16x9"/>
   <p:notesSz cx="6858000" cy="9144000"/>
   <p:embeddedFontLst>
     <p:embeddedFont>
       <p:font typeface="Cambria Math" panose="02040503050406030204" pitchFamily="18" charset="0"/>
-      <p:regular r:id="rId11"/>
+      <p:regular r:id="rId15"/>
     </p:embeddedFont>
     <p:embeddedFont>
       <p:font typeface="Lato" panose="020F0502020204030203" pitchFamily="34" charset="0"/>
-      <p:regular r:id="rId12"/>
-      <p:bold r:id="rId13"/>
-      <p:italic r:id="rId14"/>
-      <p:boldItalic r:id="rId15"/>
-    </p:embeddedFont>
-    <p:embeddedFont>
-      <p:font typeface="Montserrat" panose="00000500000000000000" pitchFamily="2" charset="0"/>
       <p:regular r:id="rId16"/>
       <p:bold r:id="rId17"/>
       <p:italic r:id="rId18"/>
       <p:boldItalic r:id="rId19"/>
     </p:embeddedFont>
     <p:embeddedFont>
+      <p:font typeface="Montserrat" panose="00000500000000000000" pitchFamily="2" charset="0"/>
+      <p:regular r:id="rId20"/>
+      <p:bold r:id="rId21"/>
+      <p:italic r:id="rId22"/>
+      <p:boldItalic r:id="rId23"/>
+    </p:embeddedFont>
+    <p:embeddedFont>
       <p:font typeface="Vidaloka" panose="020B0604020202020204" charset="0"/>
-      <p:regular r:id="rId20"/>
+      <p:regular r:id="rId24"/>
     </p:embeddedFont>
   </p:embeddedFontLst>
   <p:defaultTextStyle>
@@ -839,6 +843,385 @@
 </p:notes>
 </file>
 
+<file path=ppt/notesSlides/notesSlide10.xml><?xml version="1.0" encoding="utf-8"?>
+<p:notes xmlns:a="http://schemas.openxmlformats.org/drawingml/2006/main" xmlns:r="http://schemas.openxmlformats.org/officeDocument/2006/relationships" xmlns:p="http://schemas.openxmlformats.org/presentationml/2006/main" showMasterSp="0" showMasterPhAnim="0">
+  <p:cSld>
+    <p:spTree>
+      <p:nvGrpSpPr>
+        <p:cNvPr id="1" name="Shape 490">
+          <a:extLst>
+            <a:ext uri="{FF2B5EF4-FFF2-40B4-BE49-F238E27FC236}">
+              <a16:creationId xmlns:a16="http://schemas.microsoft.com/office/drawing/2014/main" id="{48D2B7B5-30A3-563D-9E7B-B061496D0362}"/>
+            </a:ext>
+          </a:extLst>
+        </p:cNvPr>
+        <p:cNvGrpSpPr/>
+        <p:nvPr/>
+      </p:nvGrpSpPr>
+      <p:grpSpPr>
+        <a:xfrm>
+          <a:off x="0" y="0"/>
+          <a:ext cx="0" cy="0"/>
+          <a:chOff x="0" y="0"/>
+          <a:chExt cx="0" cy="0"/>
+        </a:xfrm>
+      </p:grpSpPr>
+      <p:sp>
+        <p:nvSpPr>
+          <p:cNvPr id="491" name="Google Shape;491;gcc7554a049_0_358:notes">
+            <a:extLst>
+              <a:ext uri="{FF2B5EF4-FFF2-40B4-BE49-F238E27FC236}">
+                <a16:creationId xmlns:a16="http://schemas.microsoft.com/office/drawing/2014/main" id="{3FA3D747-D766-B396-9A44-F093E7C452FC}"/>
+              </a:ext>
+            </a:extLst>
+          </p:cNvPr>
+          <p:cNvSpPr>
+            <a:spLocks noGrp="1" noRot="1" noChangeAspect="1"/>
+          </p:cNvSpPr>
+          <p:nvPr>
+            <p:ph type="sldImg" idx="2"/>
+          </p:nvPr>
+        </p:nvSpPr>
+        <p:spPr>
+          <a:xfrm>
+            <a:off x="381000" y="685800"/>
+            <a:ext cx="6096000" cy="3429000"/>
+          </a:xfrm>
+          <a:custGeom>
+            <a:avLst/>
+            <a:gdLst/>
+            <a:ahLst/>
+            <a:cxnLst/>
+            <a:rect l="l" t="t" r="r" b="b"/>
+            <a:pathLst>
+              <a:path w="120000" h="120000" extrusionOk="0">
+                <a:moveTo>
+                  <a:pt x="0" y="0"/>
+                </a:moveTo>
+                <a:lnTo>
+                  <a:pt x="120000" y="0"/>
+                </a:lnTo>
+                <a:lnTo>
+                  <a:pt x="120000" y="120000"/>
+                </a:lnTo>
+                <a:lnTo>
+                  <a:pt x="0" y="120000"/>
+                </a:lnTo>
+                <a:close/>
+              </a:path>
+            </a:pathLst>
+          </a:custGeom>
+        </p:spPr>
+        <p:txBody>
+          <a:bodyPr/>
+          <a:lstStyle/>
+          <a:p>
+            <a:endParaRPr lang="en-IN" dirty="0"/>
+          </a:p>
+        </p:txBody>
+      </p:sp>
+      <p:sp>
+        <p:nvSpPr>
+          <p:cNvPr id="492" name="Google Shape;492;gcc7554a049_0_358:notes">
+            <a:extLst>
+              <a:ext uri="{FF2B5EF4-FFF2-40B4-BE49-F238E27FC236}">
+                <a16:creationId xmlns:a16="http://schemas.microsoft.com/office/drawing/2014/main" id="{5688CC7E-EBFB-0179-439D-5FAF70520CA6}"/>
+              </a:ext>
+            </a:extLst>
+          </p:cNvPr>
+          <p:cNvSpPr txBox="1">
+            <a:spLocks noGrp="1"/>
+          </p:cNvSpPr>
+          <p:nvPr>
+            <p:ph type="body" idx="1"/>
+          </p:nvPr>
+        </p:nvSpPr>
+        <p:spPr>
+          <a:xfrm>
+            <a:off x="685800" y="4343400"/>
+            <a:ext cx="5486400" cy="4114800"/>
+          </a:xfrm>
+          <a:prstGeom prst="rect">
+            <a:avLst/>
+          </a:prstGeom>
+        </p:spPr>
+        <p:txBody>
+          <a:bodyPr spcFirstLastPara="1" wrap="square" lIns="91425" tIns="91425" rIns="91425" bIns="91425" anchor="t" anchorCtr="0">
+            <a:noAutofit/>
+          </a:bodyPr>
+          <a:lstStyle/>
+          <a:p>
+            <a:pPr marL="0" lvl="0" indent="0" algn="l" rtl="0">
+              <a:spcBef>
+                <a:spcPts val="0"/>
+              </a:spcBef>
+              <a:spcAft>
+                <a:spcPts val="0"/>
+              </a:spcAft>
+              <a:buNone/>
+            </a:pPr>
+            <a:endParaRPr dirty="0"/>
+          </a:p>
+        </p:txBody>
+      </p:sp>
+    </p:spTree>
+    <p:extLst>
+      <p:ext uri="{BB962C8B-B14F-4D97-AF65-F5344CB8AC3E}">
+        <p14:creationId xmlns:p14="http://schemas.microsoft.com/office/powerpoint/2010/main" val="3108897080"/>
+      </p:ext>
+    </p:extLst>
+  </p:cSld>
+  <p:clrMapOvr>
+    <a:masterClrMapping/>
+  </p:clrMapOvr>
+</p:notes>
+</file>
+
+<file path=ppt/notesSlides/notesSlide11.xml><?xml version="1.0" encoding="utf-8"?>
+<p:notes xmlns:a="http://schemas.openxmlformats.org/drawingml/2006/main" xmlns:r="http://schemas.openxmlformats.org/officeDocument/2006/relationships" xmlns:p="http://schemas.openxmlformats.org/presentationml/2006/main" showMasterSp="0" showMasterPhAnim="0">
+  <p:cSld>
+    <p:spTree>
+      <p:nvGrpSpPr>
+        <p:cNvPr id="1" name="Shape 490">
+          <a:extLst>
+            <a:ext uri="{FF2B5EF4-FFF2-40B4-BE49-F238E27FC236}">
+              <a16:creationId xmlns:a16="http://schemas.microsoft.com/office/drawing/2014/main" id="{67B12D61-162D-B1C7-7EFA-E5343B162915}"/>
+            </a:ext>
+          </a:extLst>
+        </p:cNvPr>
+        <p:cNvGrpSpPr/>
+        <p:nvPr/>
+      </p:nvGrpSpPr>
+      <p:grpSpPr>
+        <a:xfrm>
+          <a:off x="0" y="0"/>
+          <a:ext cx="0" cy="0"/>
+          <a:chOff x="0" y="0"/>
+          <a:chExt cx="0" cy="0"/>
+        </a:xfrm>
+      </p:grpSpPr>
+      <p:sp>
+        <p:nvSpPr>
+          <p:cNvPr id="491" name="Google Shape;491;gcc7554a049_0_358:notes">
+            <a:extLst>
+              <a:ext uri="{FF2B5EF4-FFF2-40B4-BE49-F238E27FC236}">
+                <a16:creationId xmlns:a16="http://schemas.microsoft.com/office/drawing/2014/main" id="{66B2F10C-772E-A40E-68EB-AFE655C99319}"/>
+              </a:ext>
+            </a:extLst>
+          </p:cNvPr>
+          <p:cNvSpPr>
+            <a:spLocks noGrp="1" noRot="1" noChangeAspect="1"/>
+          </p:cNvSpPr>
+          <p:nvPr>
+            <p:ph type="sldImg" idx="2"/>
+          </p:nvPr>
+        </p:nvSpPr>
+        <p:spPr>
+          <a:xfrm>
+            <a:off x="381000" y="685800"/>
+            <a:ext cx="6096000" cy="3429000"/>
+          </a:xfrm>
+          <a:custGeom>
+            <a:avLst/>
+            <a:gdLst/>
+            <a:ahLst/>
+            <a:cxnLst/>
+            <a:rect l="l" t="t" r="r" b="b"/>
+            <a:pathLst>
+              <a:path w="120000" h="120000" extrusionOk="0">
+                <a:moveTo>
+                  <a:pt x="0" y="0"/>
+                </a:moveTo>
+                <a:lnTo>
+                  <a:pt x="120000" y="0"/>
+                </a:lnTo>
+                <a:lnTo>
+                  <a:pt x="120000" y="120000"/>
+                </a:lnTo>
+                <a:lnTo>
+                  <a:pt x="0" y="120000"/>
+                </a:lnTo>
+                <a:close/>
+              </a:path>
+            </a:pathLst>
+          </a:custGeom>
+        </p:spPr>
+        <p:txBody>
+          <a:bodyPr/>
+          <a:lstStyle/>
+          <a:p>
+            <a:endParaRPr lang="en-IN" dirty="0"/>
+          </a:p>
+        </p:txBody>
+      </p:sp>
+      <p:sp>
+        <p:nvSpPr>
+          <p:cNvPr id="492" name="Google Shape;492;gcc7554a049_0_358:notes">
+            <a:extLst>
+              <a:ext uri="{FF2B5EF4-FFF2-40B4-BE49-F238E27FC236}">
+                <a16:creationId xmlns:a16="http://schemas.microsoft.com/office/drawing/2014/main" id="{316A9D2F-64EF-C108-06F9-A59BCD84EDD5}"/>
+              </a:ext>
+            </a:extLst>
+          </p:cNvPr>
+          <p:cNvSpPr txBox="1">
+            <a:spLocks noGrp="1"/>
+          </p:cNvSpPr>
+          <p:nvPr>
+            <p:ph type="body" idx="1"/>
+          </p:nvPr>
+        </p:nvSpPr>
+        <p:spPr>
+          <a:xfrm>
+            <a:off x="685800" y="4343400"/>
+            <a:ext cx="5486400" cy="4114800"/>
+          </a:xfrm>
+          <a:prstGeom prst="rect">
+            <a:avLst/>
+          </a:prstGeom>
+        </p:spPr>
+        <p:txBody>
+          <a:bodyPr spcFirstLastPara="1" wrap="square" lIns="91425" tIns="91425" rIns="91425" bIns="91425" anchor="t" anchorCtr="0">
+            <a:noAutofit/>
+          </a:bodyPr>
+          <a:lstStyle/>
+          <a:p>
+            <a:pPr marL="0" lvl="0" indent="0" algn="l" rtl="0">
+              <a:spcBef>
+                <a:spcPts val="0"/>
+              </a:spcBef>
+              <a:spcAft>
+                <a:spcPts val="0"/>
+              </a:spcAft>
+              <a:buNone/>
+            </a:pPr>
+            <a:endParaRPr dirty="0"/>
+          </a:p>
+        </p:txBody>
+      </p:sp>
+    </p:spTree>
+    <p:extLst>
+      <p:ext uri="{BB962C8B-B14F-4D97-AF65-F5344CB8AC3E}">
+        <p14:creationId xmlns:p14="http://schemas.microsoft.com/office/powerpoint/2010/main" val="815032824"/>
+      </p:ext>
+    </p:extLst>
+  </p:cSld>
+  <p:clrMapOvr>
+    <a:masterClrMapping/>
+  </p:clrMapOvr>
+</p:notes>
+</file>
+
+<file path=ppt/notesSlides/notesSlide12.xml><?xml version="1.0" encoding="utf-8"?>
+<p:notes xmlns:a="http://schemas.openxmlformats.org/drawingml/2006/main" xmlns:r="http://schemas.openxmlformats.org/officeDocument/2006/relationships" xmlns:p="http://schemas.openxmlformats.org/presentationml/2006/main" showMasterSp="0" showMasterPhAnim="0">
+  <p:cSld>
+    <p:spTree>
+      <p:nvGrpSpPr>
+        <p:cNvPr id="1" name="Shape 567"/>
+        <p:cNvGrpSpPr/>
+        <p:nvPr/>
+      </p:nvGrpSpPr>
+      <p:grpSpPr>
+        <a:xfrm>
+          <a:off x="0" y="0"/>
+          <a:ext cx="0" cy="0"/>
+          <a:chOff x="0" y="0"/>
+          <a:chExt cx="0" cy="0"/>
+        </a:xfrm>
+      </p:grpSpPr>
+      <p:sp>
+        <p:nvSpPr>
+          <p:cNvPr id="568" name="Google Shape;568;g105aad17dc0_0_121:notes"/>
+          <p:cNvSpPr>
+            <a:spLocks noGrp="1" noRot="1" noChangeAspect="1"/>
+          </p:cNvSpPr>
+          <p:nvPr>
+            <p:ph type="sldImg" idx="2"/>
+          </p:nvPr>
+        </p:nvSpPr>
+        <p:spPr>
+          <a:xfrm>
+            <a:off x="381000" y="685800"/>
+            <a:ext cx="6096000" cy="3429000"/>
+          </a:xfrm>
+          <a:custGeom>
+            <a:avLst/>
+            <a:gdLst/>
+            <a:ahLst/>
+            <a:cxnLst/>
+            <a:rect l="l" t="t" r="r" b="b"/>
+            <a:pathLst>
+              <a:path w="120000" h="120000" extrusionOk="0">
+                <a:moveTo>
+                  <a:pt x="0" y="0"/>
+                </a:moveTo>
+                <a:lnTo>
+                  <a:pt x="120000" y="0"/>
+                </a:lnTo>
+                <a:lnTo>
+                  <a:pt x="120000" y="120000"/>
+                </a:lnTo>
+                <a:lnTo>
+                  <a:pt x="0" y="120000"/>
+                </a:lnTo>
+                <a:close/>
+              </a:path>
+            </a:pathLst>
+          </a:custGeom>
+        </p:spPr>
+        <p:txBody>
+          <a:bodyPr/>
+          <a:lstStyle/>
+          <a:p>
+            <a:endParaRPr lang="en-IN" dirty="0"/>
+          </a:p>
+        </p:txBody>
+      </p:sp>
+      <p:sp>
+        <p:nvSpPr>
+          <p:cNvPr id="569" name="Google Shape;569;g105aad17dc0_0_121:notes"/>
+          <p:cNvSpPr txBox="1">
+            <a:spLocks noGrp="1"/>
+          </p:cNvSpPr>
+          <p:nvPr>
+            <p:ph type="body" idx="1"/>
+          </p:nvPr>
+        </p:nvSpPr>
+        <p:spPr>
+          <a:xfrm>
+            <a:off x="685800" y="4343400"/>
+            <a:ext cx="5486400" cy="4114800"/>
+          </a:xfrm>
+          <a:prstGeom prst="rect">
+            <a:avLst/>
+          </a:prstGeom>
+        </p:spPr>
+        <p:txBody>
+          <a:bodyPr spcFirstLastPara="1" wrap="square" lIns="91425" tIns="91425" rIns="91425" bIns="91425" anchor="t" anchorCtr="0">
+            <a:noAutofit/>
+          </a:bodyPr>
+          <a:lstStyle/>
+          <a:p>
+            <a:pPr marL="0" lvl="0" indent="0" algn="l" rtl="0">
+              <a:spcBef>
+                <a:spcPts val="0"/>
+              </a:spcBef>
+              <a:spcAft>
+                <a:spcPts val="0"/>
+              </a:spcAft>
+              <a:buNone/>
+            </a:pPr>
+            <a:endParaRPr dirty="0"/>
+          </a:p>
+        </p:txBody>
+      </p:sp>
+    </p:spTree>
+  </p:cSld>
+  <p:clrMapOvr>
+    <a:masterClrMapping/>
+  </p:clrMapOvr>
+</p:notes>
+</file>
+
 <file path=ppt/notesSlides/notesSlide2.xml><?xml version="1.0" encoding="utf-8"?>
 <p:notes xmlns:a="http://schemas.openxmlformats.org/drawingml/2006/main" xmlns:r="http://schemas.openxmlformats.org/officeDocument/2006/relationships" xmlns:p="http://schemas.openxmlformats.org/presentationml/2006/main" showMasterSp="0" showMasterPhAnim="0">
   <p:cSld>
@@ -1602,7 +1985,13 @@
   <p:cSld>
     <p:spTree>
       <p:nvGrpSpPr>
-        <p:cNvPr id="1" name="Shape 567"/>
+        <p:cNvPr id="1" name="Shape 490">
+          <a:extLst>
+            <a:ext uri="{FF2B5EF4-FFF2-40B4-BE49-F238E27FC236}">
+              <a16:creationId xmlns:a16="http://schemas.microsoft.com/office/drawing/2014/main" id="{6A40A121-7324-A868-E2D1-E6C48F6A0EB5}"/>
+            </a:ext>
+          </a:extLst>
+        </p:cNvPr>
         <p:cNvGrpSpPr/>
         <p:nvPr/>
       </p:nvGrpSpPr>
@@ -1616,7 +2005,13 @@
       </p:grpSpPr>
       <p:sp>
         <p:nvSpPr>
-          <p:cNvPr id="568" name="Google Shape;568;g105aad17dc0_0_121:notes"/>
+          <p:cNvPr id="491" name="Google Shape;491;gcc7554a049_0_358:notes">
+            <a:extLst>
+              <a:ext uri="{FF2B5EF4-FFF2-40B4-BE49-F238E27FC236}">
+                <a16:creationId xmlns:a16="http://schemas.microsoft.com/office/drawing/2014/main" id="{F64D3C9F-D103-F402-26DE-69C1BF63936F}"/>
+              </a:ext>
+            </a:extLst>
+          </p:cNvPr>
           <p:cNvSpPr>
             <a:spLocks noGrp="1" noRot="1" noChangeAspect="1"/>
           </p:cNvSpPr>
@@ -1664,7 +2059,13 @@
       </p:sp>
       <p:sp>
         <p:nvSpPr>
-          <p:cNvPr id="569" name="Google Shape;569;g105aad17dc0_0_121:notes"/>
+          <p:cNvPr id="492" name="Google Shape;492;gcc7554a049_0_358:notes">
+            <a:extLst>
+              <a:ext uri="{FF2B5EF4-FFF2-40B4-BE49-F238E27FC236}">
+                <a16:creationId xmlns:a16="http://schemas.microsoft.com/office/drawing/2014/main" id="{6142D1CF-89DB-96AE-4BF6-BFFB68525FD3}"/>
+              </a:ext>
+            </a:extLst>
+          </p:cNvPr>
           <p:cNvSpPr txBox="1">
             <a:spLocks noGrp="1"/>
           </p:cNvSpPr>
@@ -1701,6 +2102,145 @@
         </p:txBody>
       </p:sp>
     </p:spTree>
+    <p:extLst>
+      <p:ext uri="{BB962C8B-B14F-4D97-AF65-F5344CB8AC3E}">
+        <p14:creationId xmlns:p14="http://schemas.microsoft.com/office/powerpoint/2010/main" val="3768976899"/>
+      </p:ext>
+    </p:extLst>
+  </p:cSld>
+  <p:clrMapOvr>
+    <a:masterClrMapping/>
+  </p:clrMapOvr>
+</p:notes>
+</file>
+
+<file path=ppt/notesSlides/notesSlide9.xml><?xml version="1.0" encoding="utf-8"?>
+<p:notes xmlns:a="http://schemas.openxmlformats.org/drawingml/2006/main" xmlns:r="http://schemas.openxmlformats.org/officeDocument/2006/relationships" xmlns:p="http://schemas.openxmlformats.org/presentationml/2006/main" showMasterSp="0" showMasterPhAnim="0">
+  <p:cSld>
+    <p:spTree>
+      <p:nvGrpSpPr>
+        <p:cNvPr id="1" name="Shape 490">
+          <a:extLst>
+            <a:ext uri="{FF2B5EF4-FFF2-40B4-BE49-F238E27FC236}">
+              <a16:creationId xmlns:a16="http://schemas.microsoft.com/office/drawing/2014/main" id="{C2628021-3457-7BA5-4577-6F766778F903}"/>
+            </a:ext>
+          </a:extLst>
+        </p:cNvPr>
+        <p:cNvGrpSpPr/>
+        <p:nvPr/>
+      </p:nvGrpSpPr>
+      <p:grpSpPr>
+        <a:xfrm>
+          <a:off x="0" y="0"/>
+          <a:ext cx="0" cy="0"/>
+          <a:chOff x="0" y="0"/>
+          <a:chExt cx="0" cy="0"/>
+        </a:xfrm>
+      </p:grpSpPr>
+      <p:sp>
+        <p:nvSpPr>
+          <p:cNvPr id="491" name="Google Shape;491;gcc7554a049_0_358:notes">
+            <a:extLst>
+              <a:ext uri="{FF2B5EF4-FFF2-40B4-BE49-F238E27FC236}">
+                <a16:creationId xmlns:a16="http://schemas.microsoft.com/office/drawing/2014/main" id="{FBF4AB56-7B4B-17FA-7479-ED63D1A3445C}"/>
+              </a:ext>
+            </a:extLst>
+          </p:cNvPr>
+          <p:cNvSpPr>
+            <a:spLocks noGrp="1" noRot="1" noChangeAspect="1"/>
+          </p:cNvSpPr>
+          <p:nvPr>
+            <p:ph type="sldImg" idx="2"/>
+          </p:nvPr>
+        </p:nvSpPr>
+        <p:spPr>
+          <a:xfrm>
+            <a:off x="381000" y="685800"/>
+            <a:ext cx="6096000" cy="3429000"/>
+          </a:xfrm>
+          <a:custGeom>
+            <a:avLst/>
+            <a:gdLst/>
+            <a:ahLst/>
+            <a:cxnLst/>
+            <a:rect l="l" t="t" r="r" b="b"/>
+            <a:pathLst>
+              <a:path w="120000" h="120000" extrusionOk="0">
+                <a:moveTo>
+                  <a:pt x="0" y="0"/>
+                </a:moveTo>
+                <a:lnTo>
+                  <a:pt x="120000" y="0"/>
+                </a:lnTo>
+                <a:lnTo>
+                  <a:pt x="120000" y="120000"/>
+                </a:lnTo>
+                <a:lnTo>
+                  <a:pt x="0" y="120000"/>
+                </a:lnTo>
+                <a:close/>
+              </a:path>
+            </a:pathLst>
+          </a:custGeom>
+        </p:spPr>
+        <p:txBody>
+          <a:bodyPr/>
+          <a:lstStyle/>
+          <a:p>
+            <a:endParaRPr lang="en-IN" dirty="0"/>
+          </a:p>
+        </p:txBody>
+      </p:sp>
+      <p:sp>
+        <p:nvSpPr>
+          <p:cNvPr id="492" name="Google Shape;492;gcc7554a049_0_358:notes">
+            <a:extLst>
+              <a:ext uri="{FF2B5EF4-FFF2-40B4-BE49-F238E27FC236}">
+                <a16:creationId xmlns:a16="http://schemas.microsoft.com/office/drawing/2014/main" id="{BC35BFF0-3A9E-07FB-85F7-16231F6BB68B}"/>
+              </a:ext>
+            </a:extLst>
+          </p:cNvPr>
+          <p:cNvSpPr txBox="1">
+            <a:spLocks noGrp="1"/>
+          </p:cNvSpPr>
+          <p:nvPr>
+            <p:ph type="body" idx="1"/>
+          </p:nvPr>
+        </p:nvSpPr>
+        <p:spPr>
+          <a:xfrm>
+            <a:off x="685800" y="4343400"/>
+            <a:ext cx="5486400" cy="4114800"/>
+          </a:xfrm>
+          <a:prstGeom prst="rect">
+            <a:avLst/>
+          </a:prstGeom>
+        </p:spPr>
+        <p:txBody>
+          <a:bodyPr spcFirstLastPara="1" wrap="square" lIns="91425" tIns="91425" rIns="91425" bIns="91425" anchor="t" anchorCtr="0">
+            <a:noAutofit/>
+          </a:bodyPr>
+          <a:lstStyle/>
+          <a:p>
+            <a:pPr marL="0" lvl="0" indent="0" algn="l" rtl="0">
+              <a:spcBef>
+                <a:spcPts val="0"/>
+              </a:spcBef>
+              <a:spcAft>
+                <a:spcPts val="0"/>
+              </a:spcAft>
+              <a:buNone/>
+            </a:pPr>
+            <a:endParaRPr dirty="0"/>
+          </a:p>
+        </p:txBody>
+      </p:sp>
+    </p:spTree>
+    <p:extLst>
+      <p:ext uri="{BB962C8B-B14F-4D97-AF65-F5344CB8AC3E}">
+        <p14:creationId xmlns:p14="http://schemas.microsoft.com/office/powerpoint/2010/main" val="260916606"/>
+      </p:ext>
+    </p:extLst>
   </p:cSld>
   <p:clrMapOvr>
     <a:masterClrMapping/>
@@ -7503,6 +8043,1215 @@
 </p:sld>
 </file>
 
+<file path=ppt/slides/slide10.xml><?xml version="1.0" encoding="utf-8"?>
+<p:sld xmlns:a="http://schemas.openxmlformats.org/drawingml/2006/main" xmlns:r="http://schemas.openxmlformats.org/officeDocument/2006/relationships" xmlns:p="http://schemas.openxmlformats.org/presentationml/2006/main">
+  <p:cSld>
+    <p:spTree>
+      <p:nvGrpSpPr>
+        <p:cNvPr id="1" name="Shape 493">
+          <a:extLst>
+            <a:ext uri="{FF2B5EF4-FFF2-40B4-BE49-F238E27FC236}">
+              <a16:creationId xmlns:a16="http://schemas.microsoft.com/office/drawing/2014/main" id="{D52C3F04-760A-E61B-543A-814BAF78479B}"/>
+            </a:ext>
+          </a:extLst>
+        </p:cNvPr>
+        <p:cNvGrpSpPr/>
+        <p:nvPr/>
+      </p:nvGrpSpPr>
+      <p:grpSpPr>
+        <a:xfrm>
+          <a:off x="0" y="0"/>
+          <a:ext cx="0" cy="0"/>
+          <a:chOff x="0" y="0"/>
+          <a:chExt cx="0" cy="0"/>
+        </a:xfrm>
+      </p:grpSpPr>
+      <p:sp>
+        <p:nvSpPr>
+          <p:cNvPr id="494" name="Google Shape;494;p61">
+            <a:extLst>
+              <a:ext uri="{FF2B5EF4-FFF2-40B4-BE49-F238E27FC236}">
+                <a16:creationId xmlns:a16="http://schemas.microsoft.com/office/drawing/2014/main" id="{7A369506-9ECB-4AB3-3666-54CF7178BE5E}"/>
+              </a:ext>
+            </a:extLst>
+          </p:cNvPr>
+          <p:cNvSpPr txBox="1">
+            <a:spLocks noGrp="1"/>
+          </p:cNvSpPr>
+          <p:nvPr>
+            <p:ph type="title"/>
+          </p:nvPr>
+        </p:nvSpPr>
+        <p:spPr>
+          <a:xfrm>
+            <a:off x="713224" y="445025"/>
+            <a:ext cx="5999809" cy="572700"/>
+          </a:xfrm>
+          <a:prstGeom prst="rect">
+            <a:avLst/>
+          </a:prstGeom>
+        </p:spPr>
+        <p:txBody>
+          <a:bodyPr spcFirstLastPara="1" wrap="square" lIns="91425" tIns="91425" rIns="91425" bIns="91425" anchor="t" anchorCtr="0">
+            <a:noAutofit/>
+          </a:bodyPr>
+          <a:lstStyle/>
+          <a:p>
+            <a:pPr marL="0" lvl="0" indent="0" algn="l" rtl="0">
+              <a:spcBef>
+                <a:spcPts val="0"/>
+              </a:spcBef>
+              <a:spcAft>
+                <a:spcPts val="0"/>
+              </a:spcAft>
+              <a:buNone/>
+            </a:pPr>
+            <a:r>
+              <a:rPr lang="en-US" dirty="0"/>
+              <a:t>Attack Prevention Techniques (3)</a:t>
+            </a:r>
+            <a:endParaRPr dirty="0"/>
+          </a:p>
+        </p:txBody>
+      </p:sp>
+      <mc:AlternateContent xmlns:mc="http://schemas.openxmlformats.org/markup-compatibility/2006">
+        <mc:Choice xmlns:a14="http://schemas.microsoft.com/office/drawing/2010/main" Requires="a14">
+          <p:sp>
+            <p:nvSpPr>
+              <p:cNvPr id="495" name="Google Shape;495;p61">
+                <a:extLst>
+                  <a:ext uri="{FF2B5EF4-FFF2-40B4-BE49-F238E27FC236}">
+                    <a16:creationId xmlns:a16="http://schemas.microsoft.com/office/drawing/2014/main" id="{BB4DFF62-696E-2337-68AA-16344CE3CB59}"/>
+                  </a:ext>
+                </a:extLst>
+              </p:cNvPr>
+              <p:cNvSpPr txBox="1">
+                <a:spLocks noGrp="1"/>
+              </p:cNvSpPr>
+              <p:nvPr>
+                <p:ph type="body" idx="1"/>
+              </p:nvPr>
+            </p:nvSpPr>
+            <p:spPr>
+              <a:xfrm>
+                <a:off x="713224" y="1109373"/>
+                <a:ext cx="7717500" cy="3295800"/>
+              </a:xfrm>
+              <a:prstGeom prst="rect">
+                <a:avLst/>
+              </a:prstGeom>
+            </p:spPr>
+            <p:txBody>
+              <a:bodyPr spcFirstLastPara="1" wrap="square" lIns="91425" tIns="91425" rIns="91425" bIns="91425" anchor="t" anchorCtr="0">
+                <a:noAutofit/>
+              </a:bodyPr>
+              <a:lstStyle/>
+              <a:p>
+                <a:pPr>
+                  <a:buFont typeface="Arial" panose="020B0604020202020204" pitchFamily="34" charset="0"/>
+                  <a:buChar char="•"/>
+                </a:pPr>
+                <a:r>
+                  <a:rPr lang="en-IN" b="1" dirty="0"/>
+                  <a:t>HMAC</a:t>
+                </a:r>
+                <a:r>
+                  <a:rPr lang="en-IN" dirty="0"/>
+                  <a:t> uses a shared secret </a:t>
+                </a:r>
+                <a14:m>
+                  <m:oMath xmlns:m="http://schemas.openxmlformats.org/officeDocument/2006/math">
+                    <m:r>
+                      <a:rPr lang="en-IN" i="1"/>
+                      <m:t>𝐾</m:t>
+                    </m:r>
+                  </m:oMath>
+                </a14:m>
+                <a:r>
+                  <a:rPr lang="en-IN" dirty="0"/>
+                  <a:t>(derived from Diffie–Hellman) to compute a tag:</a:t>
+                </a:r>
+              </a:p>
+              <a:p>
+                <a:pPr marL="114300" indent="0">
+                  <a:buNone/>
+                </a:pPr>
+                <a14:m>
+                  <m:oMathPara xmlns:m="http://schemas.openxmlformats.org/officeDocument/2006/math">
+                    <m:oMathParaPr>
+                      <m:jc m:val="centerGroup"/>
+                    </m:oMathParaPr>
+                    <m:oMath xmlns:m="http://schemas.openxmlformats.org/officeDocument/2006/math">
+                      <m:r>
+                        <m:rPr>
+                          <m:nor/>
+                        </m:rPr>
+                        <a:rPr lang="en-IN"/>
+                        <m:t>HMAC</m:t>
+                      </m:r>
+                      <m:d>
+                        <m:dPr>
+                          <m:sepChr m:val=","/>
+                          <m:ctrlPr>
+                            <a:rPr lang="ar-AE" i="1"/>
+                          </m:ctrlPr>
+                        </m:dPr>
+                        <m:e>
+                          <m:r>
+                            <a:rPr lang="ar-AE" i="1"/>
+                            <m:t>𝐾</m:t>
+                          </m:r>
+                        </m:e>
+                        <m:e>
+                          <m:r>
+                            <a:rPr lang="ar-AE" i="1"/>
+                            <m:t>𝑚</m:t>
+                          </m:r>
+                        </m:e>
+                      </m:d>
+                    </m:oMath>
+                  </m:oMathPara>
+                </a14:m>
+                <a:endParaRPr lang="ar-AE" dirty="0"/>
+              </a:p>
+              <a:p>
+                <a:pPr marL="114300" indent="0">
+                  <a:buNone/>
+                </a:pPr>
+                <a:r>
+                  <a:rPr lang="en-IN" b="1" dirty="0"/>
+                  <a:t>Why HMAC after DH</a:t>
+                </a:r>
+              </a:p>
+              <a:p>
+                <a:pPr>
+                  <a:buFont typeface="Arial" panose="020B0604020202020204" pitchFamily="34" charset="0"/>
+                  <a:buChar char="•"/>
+                </a:pPr>
+                <a:r>
+                  <a:rPr lang="en-IN" dirty="0"/>
+                  <a:t>Diffie–Hellman gives a </a:t>
+                </a:r>
+                <a:r>
+                  <a:rPr lang="en-IN" b="1" dirty="0"/>
+                  <a:t>shared secret</a:t>
+                </a:r>
+                <a:r>
+                  <a:rPr lang="en-IN" dirty="0"/>
+                  <a:t> but no message authentication </a:t>
+                </a:r>
+              </a:p>
+              <a:p>
+                <a:pPr>
+                  <a:buFont typeface="Arial" panose="020B0604020202020204" pitchFamily="34" charset="0"/>
+                  <a:buChar char="•"/>
+                </a:pPr>
+                <a:r>
+                  <a:rPr lang="en-IN" dirty="0"/>
+                  <a:t>HMAC uses that secret to prove both parties know </a:t>
+                </a:r>
+                <a14:m>
+                  <m:oMath xmlns:m="http://schemas.openxmlformats.org/officeDocument/2006/math">
+                    <m:r>
+                      <a:rPr lang="en-IN" i="1"/>
+                      <m:t>𝐾</m:t>
+                    </m:r>
+                  </m:oMath>
+                </a14:m>
+                <a:endParaRPr lang="en-IN" dirty="0"/>
+              </a:p>
+              <a:p>
+                <a:pPr>
+                  <a:buFont typeface="Arial" panose="020B0604020202020204" pitchFamily="34" charset="0"/>
+                  <a:buChar char="•"/>
+                </a:pPr>
+                <a:r>
+                  <a:rPr lang="en-IN" dirty="0"/>
+                  <a:t>So every message is authenticated, not just the key exchange </a:t>
+                </a:r>
+              </a:p>
+              <a:p>
+                <a:pPr marL="114300" indent="0">
+                  <a:buNone/>
+                </a:pPr>
+                <a:endParaRPr lang="en-IN" dirty="0"/>
+              </a:p>
+              <a:p>
+                <a:pPr marL="114300" indent="0">
+                  <a:buNone/>
+                </a:pPr>
+                <a:r>
+                  <a:rPr lang="en-IN" b="1" dirty="0"/>
+                  <a:t>Internal idea (why it’s secure)</a:t>
+                </a:r>
+              </a:p>
+              <a:p>
+                <a:pPr>
+                  <a:buFont typeface="Arial" panose="020B0604020202020204" pitchFamily="34" charset="0"/>
+                  <a:buChar char="•"/>
+                </a:pPr>
+                <a:r>
+                  <a:rPr lang="en-IN" dirty="0"/>
+                  <a:t>HMAC is not just a plain hash with a key. It uses </a:t>
+                </a:r>
+                <a:r>
+                  <a:rPr lang="en-IN" b="1" dirty="0"/>
+                  <a:t>two layers</a:t>
+                </a:r>
+                <a:r>
+                  <a:rPr lang="en-IN" dirty="0"/>
+                  <a:t>:</a:t>
+                </a:r>
+              </a:p>
+              <a:p>
+                <a:pPr marL="114300" indent="0">
+                  <a:buNone/>
+                </a:pPr>
+                <a14:m>
+                  <m:oMathPara xmlns:m="http://schemas.openxmlformats.org/officeDocument/2006/math">
+                    <m:oMathParaPr>
+                      <m:jc m:val="centerGroup"/>
+                    </m:oMathParaPr>
+                    <m:oMath xmlns:m="http://schemas.openxmlformats.org/officeDocument/2006/math">
+                      <m:r>
+                        <a:rPr lang="en-IN" i="1"/>
+                        <m:t>𝐻</m:t>
+                      </m:r>
+                      <m:d>
+                        <m:dPr>
+                          <m:ctrlPr>
+                            <a:rPr lang="ar-AE" i="1"/>
+                          </m:ctrlPr>
+                        </m:dPr>
+                        <m:e>
+                          <m:d>
+                            <m:dPr>
+                              <m:ctrlPr>
+                                <a:rPr lang="ar-AE" i="1"/>
+                              </m:ctrlPr>
+                            </m:dPr>
+                            <m:e>
+                              <m:r>
+                                <a:rPr lang="ar-AE" i="1"/>
+                                <m:t>𝐾</m:t>
+                              </m:r>
+                              <m:r>
+                                <a:rPr lang="ar-AE"/>
+                                <m:t>⊕</m:t>
+                              </m:r>
+                              <m:r>
+                                <a:rPr lang="ar-AE" i="1"/>
+                                <m:t>𝑜𝑝𝑎𝑑</m:t>
+                              </m:r>
+                            </m:e>
+                          </m:d>
+                          <m:r>
+                            <m:rPr>
+                              <m:nor/>
+                            </m:rPr>
+                            <a:rPr lang="ar-AE" i="1"/>
+                            <m:t> </m:t>
+                          </m:r>
+                          <m:r>
+                            <a:rPr lang="ar-AE"/>
+                            <m:t>∥</m:t>
+                          </m:r>
+                          <m:r>
+                            <m:rPr>
+                              <m:nor/>
+                            </m:rPr>
+                            <a:rPr lang="ar-AE" i="1"/>
+                            <m:t> </m:t>
+                          </m:r>
+                          <m:r>
+                            <a:rPr lang="ar-AE" i="1"/>
+                            <m:t>𝐻</m:t>
+                          </m:r>
+                          <m:d>
+                            <m:dPr>
+                              <m:ctrlPr>
+                                <a:rPr lang="ar-AE" i="1"/>
+                              </m:ctrlPr>
+                            </m:dPr>
+                            <m:e>
+                              <m:d>
+                                <m:dPr>
+                                  <m:ctrlPr>
+                                    <a:rPr lang="ar-AE" i="1"/>
+                                  </m:ctrlPr>
+                                </m:dPr>
+                                <m:e>
+                                  <m:r>
+                                    <a:rPr lang="ar-AE" i="1"/>
+                                    <m:t>𝐾</m:t>
+                                  </m:r>
+                                  <m:r>
+                                    <a:rPr lang="ar-AE"/>
+                                    <m:t>⊕</m:t>
+                                  </m:r>
+                                  <m:r>
+                                    <a:rPr lang="ar-AE" i="1"/>
+                                    <m:t>𝑖𝑝𝑎𝑑</m:t>
+                                  </m:r>
+                                </m:e>
+                              </m:d>
+                              <m:r>
+                                <m:rPr>
+                                  <m:nor/>
+                                </m:rPr>
+                                <a:rPr lang="ar-AE" i="1"/>
+                                <m:t> </m:t>
+                              </m:r>
+                              <m:r>
+                                <a:rPr lang="ar-AE"/>
+                                <m:t>∥</m:t>
+                              </m:r>
+                              <m:r>
+                                <m:rPr>
+                                  <m:nor/>
+                                </m:rPr>
+                                <a:rPr lang="ar-AE" i="1"/>
+                                <m:t> </m:t>
+                              </m:r>
+                              <m:r>
+                                <a:rPr lang="ar-AE" i="1"/>
+                                <m:t>𝑚</m:t>
+                              </m:r>
+                            </m:e>
+                          </m:d>
+                        </m:e>
+                      </m:d>
+                    </m:oMath>
+                  </m:oMathPara>
+                </a14:m>
+                <a:endParaRPr lang="ar-AE" dirty="0"/>
+              </a:p>
+              <a:p>
+                <a:pPr>
+                  <a:buFont typeface="Arial" panose="020B0604020202020204" pitchFamily="34" charset="0"/>
+                  <a:buChar char="•"/>
+                </a:pPr>
+                <a:r>
+                  <a:rPr lang="en-IN" dirty="0"/>
+                  <a:t>Inner hash binds key + message and Outer hash prevents structural attacks on the hash function </a:t>
+                </a:r>
+              </a:p>
+              <a:p>
+                <a:pPr>
+                  <a:buFont typeface="Arial" panose="020B0604020202020204" pitchFamily="34" charset="0"/>
+                  <a:buChar char="•"/>
+                </a:pPr>
+                <a:r>
+                  <a:rPr lang="en-IN" dirty="0"/>
+                  <a:t>This design protects against length-extension and related attacks</a:t>
+                </a:r>
+              </a:p>
+              <a:p>
+                <a:pPr>
+                  <a:buFont typeface="Arial" panose="020B0604020202020204" pitchFamily="34" charset="0"/>
+                  <a:buChar char="•"/>
+                </a:pPr>
+                <a:endParaRPr lang="en-IN" dirty="0"/>
+              </a:p>
+              <a:p>
+                <a:pPr marL="114300" indent="0">
+                  <a:buNone/>
+                </a:pPr>
+                <a:r>
+                  <a:rPr lang="en-IN" b="1" dirty="0"/>
+                  <a:t>In Diffie–Hellman (MITM protection after key exchange)</a:t>
+                </a:r>
+              </a:p>
+              <a:p>
+                <a:pPr>
+                  <a:buFont typeface="Arial" panose="020B0604020202020204" pitchFamily="34" charset="0"/>
+                  <a:buChar char="•"/>
+                </a:pPr>
+                <a:r>
+                  <a:rPr lang="en-IN" dirty="0"/>
+                  <a:t>After both sides compute shared key </a:t>
+                </a:r>
+                <a14:m>
+                  <m:oMath xmlns:m="http://schemas.openxmlformats.org/officeDocument/2006/math">
+                    <m:r>
+                      <a:rPr lang="en-IN" i="1"/>
+                      <m:t>𝐾</m:t>
+                    </m:r>
+                  </m:oMath>
+                </a14:m>
+                <a:r>
+                  <a:rPr lang="en-IN" dirty="0"/>
+                  <a:t>:</a:t>
+                </a:r>
+              </a:p>
+              <a:p>
+                <a:pPr>
+                  <a:buFont typeface="Arial" panose="020B0604020202020204" pitchFamily="34" charset="0"/>
+                  <a:buChar char="•"/>
+                </a:pPr>
+                <a:r>
+                  <a:rPr lang="en-IN" dirty="0"/>
+                  <a:t>Each message is sent as:</a:t>
+                </a:r>
+              </a:p>
+              <a:p>
+                <a:pPr marL="114300" indent="0">
+                  <a:buNone/>
+                </a:pPr>
+                <a14:m>
+                  <m:oMathPara xmlns:m="http://schemas.openxmlformats.org/officeDocument/2006/math">
+                    <m:oMathParaPr>
+                      <m:jc m:val="centerGroup"/>
+                    </m:oMathParaPr>
+                    <m:oMath xmlns:m="http://schemas.openxmlformats.org/officeDocument/2006/math">
+                      <m:d>
+                        <m:dPr>
+                          <m:sepChr m:val=","/>
+                          <m:ctrlPr>
+                            <a:rPr lang="ar-AE"/>
+                          </m:ctrlPr>
+                        </m:dPr>
+                        <m:e>
+                          <m:r>
+                            <a:rPr lang="ar-AE" i="1"/>
+                            <m:t>𝑚</m:t>
+                          </m:r>
+                        </m:e>
+                        <m:e>
+                          <m:r>
+                            <m:rPr>
+                              <m:nor/>
+                            </m:rPr>
+                            <a:rPr lang="en-IN" i="1"/>
+                            <m:t>HMAC</m:t>
+                          </m:r>
+                          <m:d>
+                            <m:dPr>
+                              <m:sepChr m:val=","/>
+                              <m:ctrlPr>
+                                <a:rPr lang="ar-AE" i="1"/>
+                              </m:ctrlPr>
+                            </m:dPr>
+                            <m:e>
+                              <m:r>
+                                <a:rPr lang="ar-AE" i="1"/>
+                                <m:t>𝐾</m:t>
+                              </m:r>
+                            </m:e>
+                            <m:e>
+                              <m:r>
+                                <a:rPr lang="ar-AE" i="1"/>
+                                <m:t>𝑚</m:t>
+                              </m:r>
+                            </m:e>
+                          </m:d>
+                        </m:e>
+                      </m:d>
+                    </m:oMath>
+                  </m:oMathPara>
+                </a14:m>
+                <a:endParaRPr lang="ar-AE" dirty="0"/>
+              </a:p>
+              <a:p>
+                <a:pPr>
+                  <a:buFont typeface="Arial" panose="020B0604020202020204" pitchFamily="34" charset="0"/>
+                  <a:buChar char="•"/>
+                </a:pPr>
+                <a:r>
+                  <a:rPr lang="en-IN" dirty="0"/>
+                  <a:t>Receiver recomputes HMAC and verifies </a:t>
+                </a:r>
+              </a:p>
+              <a:p>
+                <a:pPr marL="114300" indent="0">
+                  <a:buNone/>
+                </a:pPr>
+                <a:r>
+                  <a:rPr lang="en-IN" dirty="0"/>
+                  <a:t>Even if MITM was possible during </a:t>
+                </a:r>
+                <a:r>
+                  <a:rPr lang="en-IN" i="1" dirty="0"/>
+                  <a:t>unauthenticated DH</a:t>
+                </a:r>
+                <a:r>
+                  <a:rPr lang="en-IN" dirty="0"/>
+                  <a:t>, once a secure authenticated key is established, HMAC ensures </a:t>
+                </a:r>
+                <a:r>
+                  <a:rPr lang="en-IN" b="1" dirty="0"/>
+                  <a:t>all further communication is protected</a:t>
+                </a:r>
+                <a:r>
+                  <a:rPr lang="en-IN" dirty="0"/>
+                  <a:t>.</a:t>
+                </a:r>
+              </a:p>
+            </p:txBody>
+          </p:sp>
+        </mc:Choice>
+        <mc:Fallback>
+          <p:sp>
+            <p:nvSpPr>
+              <p:cNvPr id="495" name="Google Shape;495;p61">
+                <a:extLst>
+                  <a:ext uri="{FF2B5EF4-FFF2-40B4-BE49-F238E27FC236}">
+                    <a16:creationId xmlns:a16="http://schemas.microsoft.com/office/drawing/2014/main" id="{BB4DFF62-696E-2337-68AA-16344CE3CB59}"/>
+                  </a:ext>
+                </a:extLst>
+              </p:cNvPr>
+              <p:cNvSpPr txBox="1">
+                <a:spLocks noGrp="1" noRot="1" noChangeAspect="1" noMove="1" noResize="1" noEditPoints="1" noAdjustHandles="1" noChangeArrowheads="1" noChangeShapeType="1" noTextEdit="1"/>
+              </p:cNvSpPr>
+              <p:nvPr>
+                <p:ph type="body" idx="1"/>
+              </p:nvPr>
+            </p:nvSpPr>
+            <p:spPr>
+              <a:xfrm>
+                <a:off x="713224" y="1109373"/>
+                <a:ext cx="7717500" cy="3295800"/>
+              </a:xfrm>
+              <a:prstGeom prst="rect">
+                <a:avLst/>
+              </a:prstGeom>
+              <a:blipFill>
+                <a:blip r:embed="rId3"/>
+                <a:stretch>
+                  <a:fillRect t="-1479" b="-9612"/>
+                </a:stretch>
+              </a:blipFill>
+            </p:spPr>
+            <p:txBody>
+              <a:bodyPr/>
+              <a:lstStyle/>
+              <a:p>
+                <a:r>
+                  <a:rPr lang="en-IN">
+                    <a:noFill/>
+                  </a:rPr>
+                  <a:t> </a:t>
+                </a:r>
+              </a:p>
+            </p:txBody>
+          </p:sp>
+        </mc:Fallback>
+      </mc:AlternateContent>
+    </p:spTree>
+    <p:extLst>
+      <p:ext uri="{BB962C8B-B14F-4D97-AF65-F5344CB8AC3E}">
+        <p14:creationId xmlns:p14="http://schemas.microsoft.com/office/powerpoint/2010/main" val="4191033076"/>
+      </p:ext>
+    </p:extLst>
+  </p:cSld>
+  <p:clrMapOvr>
+    <a:masterClrMapping/>
+  </p:clrMapOvr>
+</p:sld>
+</file>
+
+<file path=ppt/slides/slide11.xml><?xml version="1.0" encoding="utf-8"?>
+<p:sld xmlns:a="http://schemas.openxmlformats.org/drawingml/2006/main" xmlns:r="http://schemas.openxmlformats.org/officeDocument/2006/relationships" xmlns:p="http://schemas.openxmlformats.org/presentationml/2006/main">
+  <p:cSld>
+    <p:spTree>
+      <p:nvGrpSpPr>
+        <p:cNvPr id="1" name="Shape 493">
+          <a:extLst>
+            <a:ext uri="{FF2B5EF4-FFF2-40B4-BE49-F238E27FC236}">
+              <a16:creationId xmlns:a16="http://schemas.microsoft.com/office/drawing/2014/main" id="{0807C342-CF3F-10BE-AF60-035EE88095F8}"/>
+            </a:ext>
+          </a:extLst>
+        </p:cNvPr>
+        <p:cNvGrpSpPr/>
+        <p:nvPr/>
+      </p:nvGrpSpPr>
+      <p:grpSpPr>
+        <a:xfrm>
+          <a:off x="0" y="0"/>
+          <a:ext cx="0" cy="0"/>
+          <a:chOff x="0" y="0"/>
+          <a:chExt cx="0" cy="0"/>
+        </a:xfrm>
+      </p:grpSpPr>
+      <p:sp>
+        <p:nvSpPr>
+          <p:cNvPr id="494" name="Google Shape;494;p61">
+            <a:extLst>
+              <a:ext uri="{FF2B5EF4-FFF2-40B4-BE49-F238E27FC236}">
+                <a16:creationId xmlns:a16="http://schemas.microsoft.com/office/drawing/2014/main" id="{57FF2CA1-59C2-173A-4428-AAA9C64AD92C}"/>
+              </a:ext>
+            </a:extLst>
+          </p:cNvPr>
+          <p:cNvSpPr txBox="1">
+            <a:spLocks noGrp="1"/>
+          </p:cNvSpPr>
+          <p:nvPr>
+            <p:ph type="title"/>
+          </p:nvPr>
+        </p:nvSpPr>
+        <p:spPr>
+          <a:xfrm>
+            <a:off x="713224" y="445025"/>
+            <a:ext cx="6914209" cy="572700"/>
+          </a:xfrm>
+          <a:prstGeom prst="rect">
+            <a:avLst/>
+          </a:prstGeom>
+        </p:spPr>
+        <p:txBody>
+          <a:bodyPr spcFirstLastPara="1" wrap="square" lIns="91425" tIns="91425" rIns="91425" bIns="91425" anchor="t" anchorCtr="0">
+            <a:noAutofit/>
+          </a:bodyPr>
+          <a:lstStyle/>
+          <a:p>
+            <a:pPr marL="0" lvl="0" indent="0" algn="l" rtl="0">
+              <a:spcBef>
+                <a:spcPts val="0"/>
+              </a:spcBef>
+              <a:spcAft>
+                <a:spcPts val="0"/>
+              </a:spcAft>
+              <a:buNone/>
+            </a:pPr>
+            <a:r>
+              <a:rPr lang="en-US" dirty="0"/>
+              <a:t>Results</a:t>
+            </a:r>
+            <a:endParaRPr dirty="0"/>
+          </a:p>
+        </p:txBody>
+      </p:sp>
+      <mc:AlternateContent xmlns:mc="http://schemas.openxmlformats.org/markup-compatibility/2006">
+        <mc:Choice xmlns:a14="http://schemas.microsoft.com/office/drawing/2010/main" Requires="a14">
+          <p:sp>
+            <p:nvSpPr>
+              <p:cNvPr id="4" name="TextBox 3">
+                <a:extLst>
+                  <a:ext uri="{FF2B5EF4-FFF2-40B4-BE49-F238E27FC236}">
+                    <a16:creationId xmlns:a16="http://schemas.microsoft.com/office/drawing/2014/main" id="{DC9F259F-275B-9005-E784-9D8BBDFE51CA}"/>
+                  </a:ext>
+                </a:extLst>
+              </p:cNvPr>
+              <p:cNvSpPr txBox="1"/>
+              <p:nvPr/>
+            </p:nvSpPr>
+            <p:spPr>
+              <a:xfrm>
+                <a:off x="713224" y="1017725"/>
+                <a:ext cx="7337502" cy="603178"/>
+              </a:xfrm>
+              <a:prstGeom prst="rect">
+                <a:avLst/>
+              </a:prstGeom>
+              <a:noFill/>
+            </p:spPr>
+            <p:txBody>
+              <a:bodyPr wrap="square">
+                <a:spAutoFit/>
+              </a:bodyPr>
+              <a:lstStyle/>
+              <a:p>
+                <a:pPr algn="just"/>
+                <a:r>
+                  <a:rPr lang="en-IN" sz="1100" b="1" dirty="0"/>
+                  <a:t>Reuse-k (nonce reuse)</a:t>
+                </a:r>
+                <a:r>
+                  <a:rPr lang="en-IN" sz="1100" dirty="0"/>
+                  <a:t> means using the same random value </a:t>
+                </a:r>
+                <a14:m>
+                  <m:oMath xmlns:m="http://schemas.openxmlformats.org/officeDocument/2006/math">
+                    <m:r>
+                      <a:rPr lang="en-IN" sz="1100" i="1">
+                        <a:latin typeface="Cambria Math" panose="02040503050406030204" pitchFamily="18" charset="0"/>
+                      </a:rPr>
+                      <m:t>𝑘</m:t>
+                    </m:r>
+                    <m:r>
+                      <a:rPr lang="en-US" sz="1100" b="0" i="1" smtClean="0">
+                        <a:latin typeface="Cambria Math" panose="02040503050406030204" pitchFamily="18" charset="0"/>
+                      </a:rPr>
+                      <m:t> </m:t>
+                    </m:r>
+                  </m:oMath>
+                </a14:m>
+                <a:r>
+                  <a:rPr lang="en-IN" sz="1100" dirty="0"/>
+                  <a:t>in multiple </a:t>
+                </a:r>
+                <a:r>
+                  <a:rPr lang="en-IN" sz="1100" dirty="0" err="1"/>
+                  <a:t>ElGamal</a:t>
+                </a:r>
+                <a:r>
+                  <a:rPr lang="en-IN" sz="1100" dirty="0"/>
+                  <a:t> operations; since </a:t>
+                </a:r>
+                <a14:m>
+                  <m:oMath xmlns:m="http://schemas.openxmlformats.org/officeDocument/2006/math">
+                    <m:r>
+                      <a:rPr lang="en-IN" sz="1100" i="1">
+                        <a:latin typeface="Cambria Math" panose="02040503050406030204" pitchFamily="18" charset="0"/>
+                      </a:rPr>
+                      <m:t>𝑘</m:t>
+                    </m:r>
+                  </m:oMath>
+                </a14:m>
+                <a:r>
+                  <a:rPr lang="en-IN" sz="1100" dirty="0"/>
+                  <a:t> appears in both </a:t>
+                </a:r>
+                <a14:m>
+                  <m:oMath xmlns:m="http://schemas.openxmlformats.org/officeDocument/2006/math">
+                    <m:r>
+                      <a:rPr lang="en-IN" sz="1100" i="1">
+                        <a:latin typeface="Cambria Math" panose="02040503050406030204" pitchFamily="18" charset="0"/>
+                      </a:rPr>
+                      <m:t>𝑟</m:t>
+                    </m:r>
+                    <m:r>
+                      <a:rPr lang="en-IN" sz="1100" i="0">
+                        <a:latin typeface="Cambria Math" panose="02040503050406030204" pitchFamily="18" charset="0"/>
+                      </a:rPr>
+                      <m:t>=</m:t>
+                    </m:r>
+                    <m:sSup>
+                      <m:sSupPr>
+                        <m:ctrlPr>
+                          <a:rPr lang="ar-AE" sz="1100" i="1">
+                            <a:latin typeface="Cambria Math" panose="02040503050406030204" pitchFamily="18" charset="0"/>
+                          </a:rPr>
+                        </m:ctrlPr>
+                      </m:sSupPr>
+                      <m:e>
+                        <m:r>
+                          <a:rPr lang="ar-AE" sz="1100" i="1">
+                            <a:latin typeface="Cambria Math" panose="02040503050406030204" pitchFamily="18" charset="0"/>
+                          </a:rPr>
+                          <m:t>𝑔</m:t>
+                        </m:r>
+                      </m:e>
+                      <m:sup>
+                        <m:r>
+                          <a:rPr lang="ar-AE" sz="1100" i="1">
+                            <a:latin typeface="Cambria Math" panose="02040503050406030204" pitchFamily="18" charset="0"/>
+                          </a:rPr>
+                          <m:t>𝑘</m:t>
+                        </m:r>
+                      </m:sup>
+                    </m:sSup>
+                    <m:r>
+                      <a:rPr lang="ar-AE" sz="1100" i="0">
+                        <a:latin typeface="Cambria Math" panose="02040503050406030204" pitchFamily="18" charset="0"/>
+                      </a:rPr>
+                      <m:t>  </m:t>
+                    </m:r>
+                    <m:r>
+                      <m:rPr>
+                        <m:sty m:val="p"/>
+                      </m:rPr>
+                      <a:rPr lang="en-IN" sz="1100" i="0">
+                        <a:latin typeface="Cambria Math" panose="02040503050406030204" pitchFamily="18" charset="0"/>
+                      </a:rPr>
+                      <m:t>mod</m:t>
+                    </m:r>
+                    <m:r>
+                      <m:rPr>
+                        <m:nor/>
+                      </m:rPr>
+                      <a:rPr lang="en-IN" sz="1100" b="0" i="1">
+                        <a:latin typeface="Cambria Math" panose="02040503050406030204" pitchFamily="18" charset="0"/>
+                      </a:rPr>
+                      <m:t>  </m:t>
+                    </m:r>
+                    <m:r>
+                      <a:rPr lang="en-IN" sz="1100" b="0" i="1">
+                        <a:latin typeface="Cambria Math" panose="02040503050406030204" pitchFamily="18" charset="0"/>
+                      </a:rPr>
+                      <m:t>𝑝</m:t>
+                    </m:r>
+                  </m:oMath>
+                </a14:m>
+                <a:r>
+                  <a:rPr lang="en-IN" sz="1100" dirty="0"/>
+                  <a:t> and </a:t>
+                </a:r>
+                <a14:m>
+                  <m:oMath xmlns:m="http://schemas.openxmlformats.org/officeDocument/2006/math">
+                    <m:r>
+                      <a:rPr lang="en-IN" sz="1100" i="1">
+                        <a:latin typeface="Cambria Math" panose="02040503050406030204" pitchFamily="18" charset="0"/>
+                      </a:rPr>
+                      <m:t>𝑠</m:t>
+                    </m:r>
+                    <m:r>
+                      <a:rPr lang="en-IN" sz="1100" i="0">
+                        <a:latin typeface="Cambria Math" panose="02040503050406030204" pitchFamily="18" charset="0"/>
+                      </a:rPr>
+                      <m:t>=</m:t>
+                    </m:r>
+                    <m:sSup>
+                      <m:sSupPr>
+                        <m:ctrlPr>
+                          <a:rPr lang="ar-AE" sz="1100" i="1">
+                            <a:latin typeface="Cambria Math" panose="02040503050406030204" pitchFamily="18" charset="0"/>
+                          </a:rPr>
+                        </m:ctrlPr>
+                      </m:sSupPr>
+                      <m:e>
+                        <m:r>
+                          <a:rPr lang="ar-AE" sz="1100" i="1">
+                            <a:latin typeface="Cambria Math" panose="02040503050406030204" pitchFamily="18" charset="0"/>
+                          </a:rPr>
+                          <m:t>𝑘</m:t>
+                        </m:r>
+                      </m:e>
+                      <m:sup>
+                        <m:r>
+                          <a:rPr lang="ar-AE" sz="1100" i="0">
+                            <a:latin typeface="Cambria Math" panose="02040503050406030204" pitchFamily="18" charset="0"/>
+                          </a:rPr>
+                          <m:t>−</m:t>
+                        </m:r>
+                        <m:r>
+                          <a:rPr lang="ar-AE" sz="1100" i="0">
+                            <a:latin typeface="Cambria Math" panose="02040503050406030204" pitchFamily="18" charset="0"/>
+                          </a:rPr>
+                          <m:t>1</m:t>
+                        </m:r>
+                      </m:sup>
+                    </m:sSup>
+                    <m:d>
+                      <m:dPr>
+                        <m:ctrlPr>
+                          <a:rPr lang="ar-AE" sz="1100" i="1">
+                            <a:latin typeface="Cambria Math" panose="02040503050406030204" pitchFamily="18" charset="0"/>
+                          </a:rPr>
+                        </m:ctrlPr>
+                      </m:dPr>
+                      <m:e>
+                        <m:r>
+                          <a:rPr lang="ar-AE" sz="1100" i="1">
+                            <a:latin typeface="Cambria Math" panose="02040503050406030204" pitchFamily="18" charset="0"/>
+                          </a:rPr>
+                          <m:t>𝑚</m:t>
+                        </m:r>
+                        <m:r>
+                          <a:rPr lang="ar-AE" sz="1100" i="0">
+                            <a:latin typeface="Cambria Math" panose="02040503050406030204" pitchFamily="18" charset="0"/>
+                          </a:rPr>
+                          <m:t>−</m:t>
+                        </m:r>
+                        <m:r>
+                          <a:rPr lang="ar-AE" sz="1100" i="1">
+                            <a:latin typeface="Cambria Math" panose="02040503050406030204" pitchFamily="18" charset="0"/>
+                          </a:rPr>
+                          <m:t>𝑥𝑟</m:t>
+                        </m:r>
+                      </m:e>
+                    </m:d>
+                  </m:oMath>
+                </a14:m>
+                <a:r>
+                  <a:rPr lang="ar-AE" sz="1100" dirty="0"/>
+                  <a:t> </a:t>
+                </a:r>
+                <a:r>
+                  <a:rPr lang="en-US" sz="1100" dirty="0"/>
+                  <a:t> </a:t>
+                </a:r>
+                <a:r>
+                  <a:rPr lang="en-IN" sz="1100" dirty="0"/>
+                  <a:t>reusing it makes the equations for different messages share the same unknown, linking them algebraically.</a:t>
+                </a:r>
+              </a:p>
+            </p:txBody>
+          </p:sp>
+        </mc:Choice>
+        <mc:Fallback>
+          <p:sp>
+            <p:nvSpPr>
+              <p:cNvPr id="4" name="TextBox 3">
+                <a:extLst>
+                  <a:ext uri="{FF2B5EF4-FFF2-40B4-BE49-F238E27FC236}">
+                    <a16:creationId xmlns:a16="http://schemas.microsoft.com/office/drawing/2014/main" id="{DC9F259F-275B-9005-E784-9D8BBDFE51CA}"/>
+                  </a:ext>
+                </a:extLst>
+              </p:cNvPr>
+              <p:cNvSpPr txBox="1">
+                <a:spLocks noRot="1" noChangeAspect="1" noMove="1" noResize="1" noEditPoints="1" noAdjustHandles="1" noChangeArrowheads="1" noChangeShapeType="1" noTextEdit="1"/>
+              </p:cNvSpPr>
+              <p:nvPr/>
+            </p:nvSpPr>
+            <p:spPr>
+              <a:xfrm>
+                <a:off x="713224" y="1017725"/>
+                <a:ext cx="7337502" cy="603178"/>
+              </a:xfrm>
+              <a:prstGeom prst="rect">
+                <a:avLst/>
+              </a:prstGeom>
+              <a:blipFill>
+                <a:blip r:embed="rId3"/>
+                <a:stretch>
+                  <a:fillRect t="-1010" b="-6061"/>
+                </a:stretch>
+              </a:blipFill>
+            </p:spPr>
+            <p:txBody>
+              <a:bodyPr/>
+              <a:lstStyle/>
+              <a:p>
+                <a:r>
+                  <a:rPr lang="en-IN">
+                    <a:noFill/>
+                  </a:rPr>
+                  <a:t> </a:t>
+                </a:r>
+              </a:p>
+            </p:txBody>
+          </p:sp>
+        </mc:Fallback>
+      </mc:AlternateContent>
+      <p:pic>
+        <p:nvPicPr>
+          <p:cNvPr id="8" name="Picture 7">
+            <a:extLst>
+              <a:ext uri="{FF2B5EF4-FFF2-40B4-BE49-F238E27FC236}">
+                <a16:creationId xmlns:a16="http://schemas.microsoft.com/office/drawing/2014/main" id="{BA314940-9945-B317-3ADB-81D83A2C1AFD}"/>
+              </a:ext>
+            </a:extLst>
+          </p:cNvPr>
+          <p:cNvPicPr>
+            <a:picLocks noChangeAspect="1"/>
+          </p:cNvPicPr>
+          <p:nvPr/>
+        </p:nvPicPr>
+        <p:blipFill>
+          <a:blip r:embed="rId4"/>
+          <a:stretch>
+            <a:fillRect/>
+          </a:stretch>
+        </p:blipFill>
+        <p:spPr>
+          <a:xfrm>
+            <a:off x="934326" y="1936842"/>
+            <a:ext cx="3447649" cy="1940827"/>
+          </a:xfrm>
+          <a:prstGeom prst="rect">
+            <a:avLst/>
+          </a:prstGeom>
+        </p:spPr>
+      </p:pic>
+      <p:pic>
+        <p:nvPicPr>
+          <p:cNvPr id="12" name="Picture 11">
+            <a:extLst>
+              <a:ext uri="{FF2B5EF4-FFF2-40B4-BE49-F238E27FC236}">
+                <a16:creationId xmlns:a16="http://schemas.microsoft.com/office/drawing/2014/main" id="{C14C6234-83AD-4C71-449E-9EBA23BA1036}"/>
+              </a:ext>
+            </a:extLst>
+          </p:cNvPr>
+          <p:cNvPicPr>
+            <a:picLocks noChangeAspect="1"/>
+          </p:cNvPicPr>
+          <p:nvPr/>
+        </p:nvPicPr>
+        <p:blipFill>
+          <a:blip r:embed="rId5"/>
+          <a:stretch>
+            <a:fillRect/>
+          </a:stretch>
+        </p:blipFill>
+        <p:spPr>
+          <a:xfrm>
+            <a:off x="4760673" y="1936842"/>
+            <a:ext cx="3449001" cy="1940827"/>
+          </a:xfrm>
+          <a:prstGeom prst="rect">
+            <a:avLst/>
+          </a:prstGeom>
+        </p:spPr>
+      </p:pic>
+    </p:spTree>
+    <p:extLst>
+      <p:ext uri="{BB962C8B-B14F-4D97-AF65-F5344CB8AC3E}">
+        <p14:creationId xmlns:p14="http://schemas.microsoft.com/office/powerpoint/2010/main" val="1058837466"/>
+      </p:ext>
+    </p:extLst>
+  </p:cSld>
+  <p:clrMapOvr>
+    <a:masterClrMapping/>
+  </p:clrMapOvr>
+</p:sld>
+</file>
+
+<file path=ppt/slides/slide12.xml><?xml version="1.0" encoding="utf-8"?>
+<p:sld xmlns:a="http://schemas.openxmlformats.org/drawingml/2006/main" xmlns:r="http://schemas.openxmlformats.org/officeDocument/2006/relationships" xmlns:p="http://schemas.openxmlformats.org/presentationml/2006/main">
+  <p:cSld>
+    <p:spTree>
+      <p:nvGrpSpPr>
+        <p:cNvPr id="1" name="Shape 570"/>
+        <p:cNvGrpSpPr/>
+        <p:nvPr/>
+      </p:nvGrpSpPr>
+      <p:grpSpPr>
+        <a:xfrm>
+          <a:off x="0" y="0"/>
+          <a:ext cx="0" cy="0"/>
+          <a:chOff x="0" y="0"/>
+          <a:chExt cx="0" cy="0"/>
+        </a:xfrm>
+      </p:grpSpPr>
+      <p:sp>
+        <p:nvSpPr>
+          <p:cNvPr id="571" name="Google Shape;571;p69"/>
+          <p:cNvSpPr txBox="1">
+            <a:spLocks noGrp="1"/>
+          </p:cNvSpPr>
+          <p:nvPr>
+            <p:ph type="title"/>
+          </p:nvPr>
+        </p:nvSpPr>
+        <p:spPr>
+          <a:xfrm>
+            <a:off x="1294153" y="1926150"/>
+            <a:ext cx="6555694" cy="1291200"/>
+          </a:xfrm>
+          <a:prstGeom prst="rect">
+            <a:avLst/>
+          </a:prstGeom>
+        </p:spPr>
+        <p:txBody>
+          <a:bodyPr spcFirstLastPara="1" wrap="square" lIns="91425" tIns="91425" rIns="91425" bIns="91425" anchor="t" anchorCtr="0">
+            <a:noAutofit/>
+          </a:bodyPr>
+          <a:lstStyle/>
+          <a:p>
+            <a:pPr marL="0" lvl="0" indent="0" algn="l" rtl="0">
+              <a:spcBef>
+                <a:spcPts val="0"/>
+              </a:spcBef>
+              <a:spcAft>
+                <a:spcPts val="0"/>
+              </a:spcAft>
+              <a:buNone/>
+            </a:pPr>
+            <a:r>
+              <a:rPr lang="en" dirty="0"/>
+              <a:t>Thank You!</a:t>
+            </a:r>
+            <a:endParaRPr dirty="0"/>
+          </a:p>
+        </p:txBody>
+      </p:sp>
+    </p:spTree>
+  </p:cSld>
+  <p:clrMapOvr>
+    <a:masterClrMapping/>
+  </p:clrMapOvr>
+  <p:timing>
+    <p:tnLst>
+      <p:par>
+        <p:cTn id="1" dur="indefinite" restart="never" nodeType="tmRoot">
+          <p:childTnLst>
+            <p:seq concurrent="1" nextAc="seek">
+              <p:cTn id="2" dur="indefinite" nodeType="mainSeq">
+                <p:childTnLst>
+                  <p:par>
+                    <p:cTn id="3" fill="hold">
+                      <p:stCondLst>
+                        <p:cond delay="indefinite"/>
+                      </p:stCondLst>
+                      <p:childTnLst>
+                        <p:par>
+                          <p:cTn id="4" fill="hold">
+                            <p:stCondLst>
+                              <p:cond delay="0"/>
+                            </p:stCondLst>
+                            <p:childTnLst>
+                              <p:par>
+                                <p:cTn id="5" presetID="2" presetClass="entr" presetSubtype="2" fill="hold" nodeType="clickEffect">
+                                  <p:stCondLst>
+                                    <p:cond delay="0"/>
+                                  </p:stCondLst>
+                                  <p:childTnLst>
+                                    <p:set>
+                                      <p:cBhvr>
+                                        <p:cTn id="6" dur="1" fill="hold">
+                                          <p:stCondLst>
+                                            <p:cond delay="0"/>
+                                          </p:stCondLst>
+                                        </p:cTn>
+                                        <p:tgtEl>
+                                          <p:spTgt spid="571"/>
+                                        </p:tgtEl>
+                                        <p:attrNameLst>
+                                          <p:attrName>style.visibility</p:attrName>
+                                        </p:attrNameLst>
+                                      </p:cBhvr>
+                                      <p:to>
+                                        <p:strVal val="visible"/>
+                                      </p:to>
+                                    </p:set>
+                                    <p:anim calcmode="lin" valueType="num">
+                                      <p:cBhvr additive="base">
+                                        <p:cTn id="7" dur="1000"/>
+                                        <p:tgtEl>
+                                          <p:spTgt spid="571"/>
+                                        </p:tgtEl>
+                                        <p:attrNameLst>
+                                          <p:attrName>ppt_x</p:attrName>
+                                        </p:attrNameLst>
+                                      </p:cBhvr>
+                                      <p:tavLst>
+                                        <p:tav tm="0">
+                                          <p:val>
+                                            <p:strVal val="#ppt_x+1"/>
+                                          </p:val>
+                                        </p:tav>
+                                        <p:tav tm="100000">
+                                          <p:val>
+                                            <p:strVal val="#ppt_x"/>
+                                          </p:val>
+                                        </p:tav>
+                                      </p:tavLst>
+                                    </p:anim>
+                                  </p:childTnLst>
+                                </p:cTn>
+                              </p:par>
+                            </p:childTnLst>
+                          </p:cTn>
+                        </p:par>
+                      </p:childTnLst>
+                    </p:cTn>
+                  </p:par>
+                </p:childTnLst>
+              </p:cTn>
+              <p:prevCondLst>
+                <p:cond evt="onPrev" delay="0">
+                  <p:tgtEl>
+                    <p:sldTgt/>
+                  </p:tgtEl>
+                </p:cond>
+              </p:prevCondLst>
+              <p:nextCondLst>
+                <p:cond evt="onNext" delay="0">
+                  <p:tgtEl>
+                    <p:sldTgt/>
+                  </p:tgtEl>
+                </p:cond>
+              </p:nextCondLst>
+            </p:seq>
+          </p:childTnLst>
+        </p:cTn>
+      </p:par>
+    </p:tnLst>
+  </p:timing>
+</p:sld>
+</file>
+
 <file path=ppt/slides/slide2.xml><?xml version="1.0" encoding="utf-8"?>
 <p:sld xmlns:a="http://schemas.openxmlformats.org/drawingml/2006/main" xmlns:r="http://schemas.openxmlformats.org/officeDocument/2006/relationships" xmlns:p="http://schemas.openxmlformats.org/presentationml/2006/main">
   <p:cSld>
@@ -10149,7 +11898,7 @@
             </a:pPr>
             <a:r>
               <a:rPr lang="en-US" dirty="0"/>
-              <a:t>Partial Attack Results</a:t>
+              <a:t>MITM Attack Results</a:t>
             </a:r>
             <a:endParaRPr dirty="0"/>
           </a:p>
@@ -10313,7 +12062,13 @@
   <p:cSld>
     <p:spTree>
       <p:nvGrpSpPr>
-        <p:cNvPr id="1" name="Shape 570"/>
+        <p:cNvPr id="1" name="Shape 493">
+          <a:extLst>
+            <a:ext uri="{FF2B5EF4-FFF2-40B4-BE49-F238E27FC236}">
+              <a16:creationId xmlns:a16="http://schemas.microsoft.com/office/drawing/2014/main" id="{FA329622-AF53-8F5C-C5E3-7392841D7283}"/>
+            </a:ext>
+          </a:extLst>
+        </p:cNvPr>
         <p:cNvGrpSpPr/>
         <p:nvPr/>
       </p:nvGrpSpPr>
@@ -10327,7 +12082,13 @@
       </p:grpSpPr>
       <p:sp>
         <p:nvSpPr>
-          <p:cNvPr id="571" name="Google Shape;571;p69"/>
+          <p:cNvPr id="494" name="Google Shape;494;p61">
+            <a:extLst>
+              <a:ext uri="{FF2B5EF4-FFF2-40B4-BE49-F238E27FC236}">
+                <a16:creationId xmlns:a16="http://schemas.microsoft.com/office/drawing/2014/main" id="{2A9EA327-8060-83B5-6C0A-A1A13A528A82}"/>
+              </a:ext>
+            </a:extLst>
+          </p:cNvPr>
           <p:cNvSpPr txBox="1">
             <a:spLocks noGrp="1"/>
           </p:cNvSpPr>
@@ -10337,8 +12098,8 @@
         </p:nvSpPr>
         <p:spPr>
           <a:xfrm>
-            <a:off x="1294153" y="1926150"/>
-            <a:ext cx="6555694" cy="1291200"/>
+            <a:off x="713224" y="445025"/>
+            <a:ext cx="5999809" cy="572700"/>
           </a:xfrm>
           <a:prstGeom prst="rect">
             <a:avLst/>
@@ -10360,116 +12121,1156 @@
               <a:buNone/>
             </a:pPr>
             <a:r>
-              <a:rPr lang="en" dirty="0"/>
-              <a:t>Thank You!</a:t>
+              <a:rPr lang="en-US" dirty="0"/>
+              <a:t>Attack Prevention Techniques (1)</a:t>
             </a:r>
             <a:endParaRPr dirty="0"/>
           </a:p>
         </p:txBody>
       </p:sp>
+      <mc:AlternateContent xmlns:mc="http://schemas.openxmlformats.org/markup-compatibility/2006">
+        <mc:Choice xmlns:a14="http://schemas.microsoft.com/office/drawing/2010/main" Requires="a14">
+          <p:sp>
+            <p:nvSpPr>
+              <p:cNvPr id="495" name="Google Shape;495;p61">
+                <a:extLst>
+                  <a:ext uri="{FF2B5EF4-FFF2-40B4-BE49-F238E27FC236}">
+                    <a16:creationId xmlns:a16="http://schemas.microsoft.com/office/drawing/2014/main" id="{D34F9918-E55B-0E2D-3254-3D0134B74EF2}"/>
+                  </a:ext>
+                </a:extLst>
+              </p:cNvPr>
+              <p:cNvSpPr txBox="1">
+                <a:spLocks noGrp="1"/>
+              </p:cNvSpPr>
+              <p:nvPr>
+                <p:ph type="body" idx="1"/>
+              </p:nvPr>
+            </p:nvSpPr>
+            <p:spPr>
+              <a:xfrm>
+                <a:off x="713224" y="1109373"/>
+                <a:ext cx="7717500" cy="3295800"/>
+              </a:xfrm>
+              <a:prstGeom prst="rect">
+                <a:avLst/>
+              </a:prstGeom>
+            </p:spPr>
+            <p:txBody>
+              <a:bodyPr spcFirstLastPara="1" wrap="square" lIns="91425" tIns="91425" rIns="91425" bIns="91425" anchor="t" anchorCtr="0">
+                <a:noAutofit/>
+              </a:bodyPr>
+              <a:lstStyle/>
+              <a:p>
+                <a:pPr>
+                  <a:buFont typeface="Arial" panose="020B0604020202020204" pitchFamily="34" charset="0"/>
+                  <a:buChar char="•"/>
+                </a:pPr>
+                <a:r>
+                  <a:rPr lang="en-IN" dirty="0"/>
+                  <a:t>The </a:t>
+                </a:r>
+                <a:r>
+                  <a:rPr lang="en-IN" b="1" dirty="0" err="1"/>
+                  <a:t>ElGamal</a:t>
+                </a:r>
+                <a:r>
+                  <a:rPr lang="en-IN" b="1" dirty="0"/>
+                  <a:t> signature scheme</a:t>
+                </a:r>
+                <a:r>
+                  <a:rPr lang="en-IN" dirty="0"/>
+                  <a:t> is used to </a:t>
+                </a:r>
+                <a:r>
+                  <a:rPr lang="en-IN" b="1" dirty="0"/>
+                  <a:t>sign the Diffie–Hellman public values</a:t>
+                </a:r>
+                <a:r>
+                  <a:rPr lang="en-IN" dirty="0"/>
+                  <a:t>.</a:t>
+                </a:r>
+              </a:p>
+              <a:p>
+                <a:pPr>
+                  <a:buFont typeface="Arial" panose="020B0604020202020204" pitchFamily="34" charset="0"/>
+                  <a:buChar char="•"/>
+                </a:pPr>
+                <a:r>
+                  <a:rPr lang="en-IN" dirty="0"/>
+                  <a:t>Theory:</a:t>
+                </a:r>
+              </a:p>
+              <a:p>
+                <a:pPr>
+                  <a:buFont typeface="Arial" panose="020B0604020202020204" pitchFamily="34" charset="0"/>
+                  <a:buChar char="•"/>
+                </a:pPr>
+                <a:r>
+                  <a:rPr lang="en-IN" dirty="0"/>
+                  <a:t>Signature proves that a public key (like </a:t>
+                </a:r>
+                <a14:m>
+                  <m:oMath xmlns:m="http://schemas.openxmlformats.org/officeDocument/2006/math">
+                    <m:sSup>
+                      <m:sSupPr>
+                        <m:ctrlPr>
+                          <a:rPr lang="ar-AE"/>
+                        </m:ctrlPr>
+                      </m:sSupPr>
+                      <m:e>
+                        <m:r>
+                          <a:rPr lang="ar-AE" i="1"/>
+                          <m:t>𝑔</m:t>
+                        </m:r>
+                      </m:e>
+                      <m:sup>
+                        <m:r>
+                          <a:rPr lang="ar-AE" i="1"/>
+                          <m:t>𝑎</m:t>
+                        </m:r>
+                      </m:sup>
+                    </m:sSup>
+                  </m:oMath>
+                </a14:m>
+                <a:r>
+                  <a:rPr lang="ar-AE" dirty="0"/>
+                  <a:t>) </a:t>
+                </a:r>
+                <a:r>
+                  <a:rPr lang="en-IN" dirty="0"/>
+                  <a:t>really came from the claimed sender </a:t>
+                </a:r>
+              </a:p>
+              <a:p>
+                <a:pPr>
+                  <a:buFont typeface="Arial" panose="020B0604020202020204" pitchFamily="34" charset="0"/>
+                  <a:buChar char="•"/>
+                </a:pPr>
+                <a:r>
+                  <a:rPr lang="en-IN" dirty="0"/>
+                  <a:t>Verification ensures: </a:t>
+                </a:r>
+              </a:p>
+              <a:p>
+                <a:pPr lvl="1">
+                  <a:buFont typeface="Arial" panose="020B0604020202020204" pitchFamily="34" charset="0"/>
+                  <a:buChar char="•"/>
+                </a:pPr>
+                <a:r>
+                  <a:rPr lang="en-IN" sz="1100" dirty="0"/>
+                  <a:t>Integrity (not modified) </a:t>
+                </a:r>
+              </a:p>
+              <a:p>
+                <a:pPr lvl="1">
+                  <a:buFont typeface="Arial" panose="020B0604020202020204" pitchFamily="34" charset="0"/>
+                  <a:buChar char="•"/>
+                </a:pPr>
+                <a:r>
+                  <a:rPr lang="en-IN" sz="1100" dirty="0"/>
+                  <a:t>Authenticity (correct sender) </a:t>
+                </a:r>
+              </a:p>
+              <a:p>
+                <a:pPr>
+                  <a:buFont typeface="Arial" panose="020B0604020202020204" pitchFamily="34" charset="0"/>
+                  <a:buChar char="•"/>
+                </a:pPr>
+                <a:r>
+                  <a:rPr lang="en-IN" dirty="0"/>
+                  <a:t>So in DH:</a:t>
+                </a:r>
+              </a:p>
+              <a:p>
+                <a:pPr>
+                  <a:buFont typeface="Arial" panose="020B0604020202020204" pitchFamily="34" charset="0"/>
+                  <a:buChar char="•"/>
+                </a:pPr>
+                <a:r>
+                  <a:rPr lang="en-IN" dirty="0"/>
+                  <a:t>Instead of sending </a:t>
+                </a:r>
+                <a14:m>
+                  <m:oMath xmlns:m="http://schemas.openxmlformats.org/officeDocument/2006/math">
+                    <m:sSup>
+                      <m:sSupPr>
+                        <m:ctrlPr>
+                          <a:rPr lang="ar-AE"/>
+                        </m:ctrlPr>
+                      </m:sSupPr>
+                      <m:e>
+                        <m:r>
+                          <a:rPr lang="ar-AE" i="1"/>
+                          <m:t>𝑔</m:t>
+                        </m:r>
+                      </m:e>
+                      <m:sup>
+                        <m:r>
+                          <a:rPr lang="ar-AE" i="1"/>
+                          <m:t>𝑎</m:t>
+                        </m:r>
+                      </m:sup>
+                    </m:sSup>
+                  </m:oMath>
+                </a14:m>
+                <a:r>
+                  <a:rPr lang="en-IN" dirty="0"/>
+                  <a:t>directly </a:t>
+                </a:r>
+              </a:p>
+              <a:p>
+                <a:pPr>
+                  <a:buFont typeface="Arial" panose="020B0604020202020204" pitchFamily="34" charset="0"/>
+                  <a:buChar char="•"/>
+                </a:pPr>
+                <a:r>
+                  <a:rPr lang="en-IN" dirty="0"/>
+                  <a:t>Send: </a:t>
+                </a:r>
+                <a14:m>
+                  <m:oMath xmlns:m="http://schemas.openxmlformats.org/officeDocument/2006/math">
+                    <m:sSup>
+                      <m:sSupPr>
+                        <m:ctrlPr>
+                          <a:rPr lang="ar-AE"/>
+                        </m:ctrlPr>
+                      </m:sSupPr>
+                      <m:e>
+                        <m:r>
+                          <a:rPr lang="ar-AE" i="1"/>
+                          <m:t>𝑔</m:t>
+                        </m:r>
+                      </m:e>
+                      <m:sup>
+                        <m:r>
+                          <a:rPr lang="ar-AE" i="1"/>
+                          <m:t>𝑎</m:t>
+                        </m:r>
+                      </m:sup>
+                    </m:sSup>
+                  </m:oMath>
+                </a14:m>
+                <a:r>
+                  <a:rPr lang="ar-AE" dirty="0"/>
+                  <a:t>+ </a:t>
+                </a:r>
+                <a:r>
+                  <a:rPr lang="en-IN" dirty="0"/>
+                  <a:t>signature -&gt; Prevents attacker from replacing values</a:t>
+                </a:r>
+              </a:p>
+              <a:p>
+                <a:pPr marL="171450" indent="-171450" algn="just">
+                  <a:buSzPts val="1100"/>
+                  <a:buFont typeface="Arial" panose="020B0604020202020204" pitchFamily="34" charset="0"/>
+                  <a:buChar char="•"/>
+                </a:pPr>
+                <a:endParaRPr lang="en-US" dirty="0"/>
+              </a:p>
+              <a:p>
+                <a:pPr>
+                  <a:buFont typeface="Arial" panose="020B0604020202020204" pitchFamily="34" charset="0"/>
+                  <a:buChar char="•"/>
+                </a:pPr>
+                <a:r>
+                  <a:rPr lang="en-US" b="1" dirty="0"/>
+                  <a:t>Nonce </a:t>
+                </a:r>
+                <a14:m>
+                  <m:oMath xmlns:m="http://schemas.openxmlformats.org/officeDocument/2006/math">
+                    <m:r>
+                      <a:rPr lang="en-US" b="1" i="1"/>
+                      <m:t>𝒌</m:t>
+                    </m:r>
+                  </m:oMath>
+                </a14:m>
+                <a:r>
+                  <a:rPr lang="en-US" b="1" dirty="0"/>
+                  <a:t> </a:t>
+                </a:r>
+                <a:r>
+                  <a:rPr lang="en-US" dirty="0"/>
+                  <a:t>is used in signature generation.</a:t>
+                </a:r>
+              </a:p>
+              <a:p>
+                <a:pPr>
+                  <a:buFont typeface="Arial" panose="020B0604020202020204" pitchFamily="34" charset="0"/>
+                  <a:buChar char="•"/>
+                </a:pPr>
+                <a:r>
+                  <a:rPr lang="en-US" dirty="0"/>
+                  <a:t>Theory:</a:t>
+                </a:r>
+              </a:p>
+              <a:p>
+                <a:pPr>
+                  <a:buFont typeface="Arial" panose="020B0604020202020204" pitchFamily="34" charset="0"/>
+                  <a:buChar char="•"/>
+                </a:pPr>
+                <a:r>
+                  <a:rPr lang="en-US" dirty="0"/>
+                  <a:t>Ensures each signature is </a:t>
+                </a:r>
+                <a:r>
+                  <a:rPr lang="en-US" b="1" dirty="0"/>
+                  <a:t>unique and unpredictable</a:t>
+                </a:r>
+                <a:r>
+                  <a:rPr lang="en-US" dirty="0"/>
+                  <a:t> </a:t>
+                </a:r>
+              </a:p>
+              <a:p>
+                <a:pPr>
+                  <a:buFont typeface="Arial" panose="020B0604020202020204" pitchFamily="34" charset="0"/>
+                  <a:buChar char="•"/>
+                </a:pPr>
+                <a:r>
+                  <a:rPr lang="en-US" dirty="0"/>
+                  <a:t>Prevents attackers from: </a:t>
+                </a:r>
+              </a:p>
+              <a:p>
+                <a:pPr lvl="1">
+                  <a:buFont typeface="Arial" panose="020B0604020202020204" pitchFamily="34" charset="0"/>
+                  <a:buChar char="•"/>
+                </a:pPr>
+                <a:r>
+                  <a:rPr lang="en-US" sz="1100" dirty="0"/>
+                  <a:t>Reusing signatures </a:t>
+                </a:r>
+              </a:p>
+              <a:p>
+                <a:pPr lvl="1">
+                  <a:buFont typeface="Arial" panose="020B0604020202020204" pitchFamily="34" charset="0"/>
+                  <a:buChar char="•"/>
+                </a:pPr>
+                <a:r>
+                  <a:rPr lang="en-US" sz="1100" dirty="0"/>
+                  <a:t>Solving equations to recover private key </a:t>
+                </a:r>
+              </a:p>
+              <a:p>
+                <a:pPr>
+                  <a:buFont typeface="Arial" panose="020B0604020202020204" pitchFamily="34" charset="0"/>
+                  <a:buChar char="•"/>
+                </a:pPr>
+                <a:r>
+                  <a:rPr lang="en-US" dirty="0"/>
+                  <a:t>If nonce is reused:</a:t>
+                </a:r>
+              </a:p>
+              <a:p>
+                <a:pPr>
+                  <a:buFont typeface="Arial" panose="020B0604020202020204" pitchFamily="34" charset="0"/>
+                  <a:buChar char="•"/>
+                </a:pPr>
+                <a:r>
+                  <a:rPr lang="en-US" dirty="0"/>
+                  <a:t>Attacker can compute private key → forge signatures -&gt; MITM becomes possible again</a:t>
+                </a:r>
+              </a:p>
+              <a:p>
+                <a:pPr marL="171450" indent="-171450" algn="just">
+                  <a:buSzPts val="1100"/>
+                  <a:buFont typeface="Arial" panose="020B0604020202020204" pitchFamily="34" charset="0"/>
+                  <a:buChar char="•"/>
+                </a:pPr>
+                <a:endParaRPr dirty="0"/>
+              </a:p>
+            </p:txBody>
+          </p:sp>
+        </mc:Choice>
+        <mc:Fallback>
+          <p:sp>
+            <p:nvSpPr>
+              <p:cNvPr id="495" name="Google Shape;495;p61">
+                <a:extLst>
+                  <a:ext uri="{FF2B5EF4-FFF2-40B4-BE49-F238E27FC236}">
+                    <a16:creationId xmlns:a16="http://schemas.microsoft.com/office/drawing/2014/main" id="{D34F9918-E55B-0E2D-3254-3D0134B74EF2}"/>
+                  </a:ext>
+                </a:extLst>
+              </p:cNvPr>
+              <p:cNvSpPr txBox="1">
+                <a:spLocks noGrp="1" noRot="1" noChangeAspect="1" noMove="1" noResize="1" noEditPoints="1" noAdjustHandles="1" noChangeArrowheads="1" noChangeShapeType="1" noTextEdit="1"/>
+              </p:cNvSpPr>
+              <p:nvPr>
+                <p:ph type="body" idx="1"/>
+              </p:nvPr>
+            </p:nvSpPr>
+            <p:spPr>
+              <a:xfrm>
+                <a:off x="713224" y="1109373"/>
+                <a:ext cx="7717500" cy="3295800"/>
+              </a:xfrm>
+              <a:prstGeom prst="rect">
+                <a:avLst/>
+              </a:prstGeom>
+              <a:blipFill>
+                <a:blip r:embed="rId3"/>
+                <a:stretch>
+                  <a:fillRect t="-1479" b="-1664"/>
+                </a:stretch>
+              </a:blipFill>
+            </p:spPr>
+            <p:txBody>
+              <a:bodyPr/>
+              <a:lstStyle/>
+              <a:p>
+                <a:r>
+                  <a:rPr lang="en-IN">
+                    <a:noFill/>
+                  </a:rPr>
+                  <a:t> </a:t>
+                </a:r>
+              </a:p>
+            </p:txBody>
+          </p:sp>
+        </mc:Fallback>
+      </mc:AlternateContent>
     </p:spTree>
+    <p:extLst>
+      <p:ext uri="{BB962C8B-B14F-4D97-AF65-F5344CB8AC3E}">
+        <p14:creationId xmlns:p14="http://schemas.microsoft.com/office/powerpoint/2010/main" val="1194414603"/>
+      </p:ext>
+    </p:extLst>
   </p:cSld>
   <p:clrMapOvr>
     <a:masterClrMapping/>
   </p:clrMapOvr>
-  <p:timing>
-    <p:tnLst>
-      <p:par>
-        <p:cTn id="1" dur="indefinite" restart="never" nodeType="tmRoot">
-          <p:childTnLst>
-            <p:seq concurrent="1" nextAc="seek">
-              <p:cTn id="2" dur="indefinite" nodeType="mainSeq">
-                <p:childTnLst>
-                  <p:par>
-                    <p:cTn id="3" fill="hold">
-                      <p:stCondLst>
-                        <p:cond delay="indefinite"/>
-                      </p:stCondLst>
-                      <p:childTnLst>
-                        <p:par>
-                          <p:cTn id="4" fill="hold">
-                            <p:stCondLst>
-                              <p:cond delay="0"/>
-                            </p:stCondLst>
-                            <p:childTnLst>
-                              <p:par>
-                                <p:cTn id="5" presetID="2" presetClass="entr" presetSubtype="2" fill="hold" nodeType="clickEffect">
-                                  <p:stCondLst>
-                                    <p:cond delay="0"/>
-                                  </p:stCondLst>
-                                  <p:childTnLst>
-                                    <p:set>
-                                      <p:cBhvr>
-                                        <p:cTn id="6" dur="1" fill="hold">
-                                          <p:stCondLst>
-                                            <p:cond delay="0"/>
-                                          </p:stCondLst>
-                                        </p:cTn>
-                                        <p:tgtEl>
-                                          <p:spTgt spid="571"/>
-                                        </p:tgtEl>
-                                        <p:attrNameLst>
-                                          <p:attrName>style.visibility</p:attrName>
-                                        </p:attrNameLst>
-                                      </p:cBhvr>
-                                      <p:to>
-                                        <p:strVal val="visible"/>
-                                      </p:to>
-                                    </p:set>
-                                    <p:anim calcmode="lin" valueType="num">
-                                      <p:cBhvr additive="base">
-                                        <p:cTn id="7" dur="1000"/>
-                                        <p:tgtEl>
-                                          <p:spTgt spid="571"/>
-                                        </p:tgtEl>
-                                        <p:attrNameLst>
-                                          <p:attrName>ppt_x</p:attrName>
-                                        </p:attrNameLst>
-                                      </p:cBhvr>
-                                      <p:tavLst>
-                                        <p:tav tm="0">
-                                          <p:val>
-                                            <p:strVal val="#ppt_x+1"/>
-                                          </p:val>
-                                        </p:tav>
-                                        <p:tav tm="100000">
-                                          <p:val>
-                                            <p:strVal val="#ppt_x"/>
-                                          </p:val>
-                                        </p:tav>
-                                      </p:tavLst>
-                                    </p:anim>
-                                  </p:childTnLst>
-                                </p:cTn>
-                              </p:par>
-                            </p:childTnLst>
-                          </p:cTn>
-                        </p:par>
-                      </p:childTnLst>
-                    </p:cTn>
-                  </p:par>
-                </p:childTnLst>
-              </p:cTn>
-              <p:prevCondLst>
-                <p:cond evt="onPrev" delay="0">
-                  <p:tgtEl>
-                    <p:sldTgt/>
-                  </p:tgtEl>
-                </p:cond>
-              </p:prevCondLst>
-              <p:nextCondLst>
-                <p:cond evt="onNext" delay="0">
-                  <p:tgtEl>
-                    <p:sldTgt/>
-                  </p:tgtEl>
-                </p:cond>
-              </p:nextCondLst>
-            </p:seq>
-          </p:childTnLst>
-        </p:cTn>
-      </p:par>
-    </p:tnLst>
-  </p:timing>
+</p:sld>
+</file>
+
+<file path=ppt/slides/slide9.xml><?xml version="1.0" encoding="utf-8"?>
+<p:sld xmlns:a="http://schemas.openxmlformats.org/drawingml/2006/main" xmlns:r="http://schemas.openxmlformats.org/officeDocument/2006/relationships" xmlns:p="http://schemas.openxmlformats.org/presentationml/2006/main">
+  <p:cSld>
+    <p:spTree>
+      <p:nvGrpSpPr>
+        <p:cNvPr id="1" name="Shape 493">
+          <a:extLst>
+            <a:ext uri="{FF2B5EF4-FFF2-40B4-BE49-F238E27FC236}">
+              <a16:creationId xmlns:a16="http://schemas.microsoft.com/office/drawing/2014/main" id="{C782F484-C1A8-BB1E-894F-A60ED896C388}"/>
+            </a:ext>
+          </a:extLst>
+        </p:cNvPr>
+        <p:cNvGrpSpPr/>
+        <p:nvPr/>
+      </p:nvGrpSpPr>
+      <p:grpSpPr>
+        <a:xfrm>
+          <a:off x="0" y="0"/>
+          <a:ext cx="0" cy="0"/>
+          <a:chOff x="0" y="0"/>
+          <a:chExt cx="0" cy="0"/>
+        </a:xfrm>
+      </p:grpSpPr>
+      <p:sp>
+        <p:nvSpPr>
+          <p:cNvPr id="494" name="Google Shape;494;p61">
+            <a:extLst>
+              <a:ext uri="{FF2B5EF4-FFF2-40B4-BE49-F238E27FC236}">
+                <a16:creationId xmlns:a16="http://schemas.microsoft.com/office/drawing/2014/main" id="{63244194-A8E9-CC1B-4985-C383F91B515A}"/>
+              </a:ext>
+            </a:extLst>
+          </p:cNvPr>
+          <p:cNvSpPr txBox="1">
+            <a:spLocks noGrp="1"/>
+          </p:cNvSpPr>
+          <p:nvPr>
+            <p:ph type="title"/>
+          </p:nvPr>
+        </p:nvSpPr>
+        <p:spPr>
+          <a:xfrm>
+            <a:off x="713224" y="445025"/>
+            <a:ext cx="5999809" cy="572700"/>
+          </a:xfrm>
+          <a:prstGeom prst="rect">
+            <a:avLst/>
+          </a:prstGeom>
+        </p:spPr>
+        <p:txBody>
+          <a:bodyPr spcFirstLastPara="1" wrap="square" lIns="91425" tIns="91425" rIns="91425" bIns="91425" anchor="t" anchorCtr="0">
+            <a:noAutofit/>
+          </a:bodyPr>
+          <a:lstStyle/>
+          <a:p>
+            <a:pPr marL="0" lvl="0" indent="0" algn="l" rtl="0">
+              <a:spcBef>
+                <a:spcPts val="0"/>
+              </a:spcBef>
+              <a:spcAft>
+                <a:spcPts val="0"/>
+              </a:spcAft>
+              <a:buNone/>
+            </a:pPr>
+            <a:r>
+              <a:rPr lang="en-US" dirty="0"/>
+              <a:t>Attack Prevention Techniques (2)</a:t>
+            </a:r>
+            <a:endParaRPr dirty="0"/>
+          </a:p>
+        </p:txBody>
+      </p:sp>
+      <mc:AlternateContent xmlns:mc="http://schemas.openxmlformats.org/markup-compatibility/2006">
+        <mc:Choice xmlns:a14="http://schemas.microsoft.com/office/drawing/2010/main" Requires="a14">
+          <p:sp>
+            <p:nvSpPr>
+              <p:cNvPr id="495" name="Google Shape;495;p61">
+                <a:extLst>
+                  <a:ext uri="{FF2B5EF4-FFF2-40B4-BE49-F238E27FC236}">
+                    <a16:creationId xmlns:a16="http://schemas.microsoft.com/office/drawing/2014/main" id="{E583D7FD-7BC1-F3BF-6154-039EAB421DDF}"/>
+                  </a:ext>
+                </a:extLst>
+              </p:cNvPr>
+              <p:cNvSpPr txBox="1">
+                <a:spLocks noGrp="1"/>
+              </p:cNvSpPr>
+              <p:nvPr>
+                <p:ph type="body" idx="1"/>
+              </p:nvPr>
+            </p:nvSpPr>
+            <p:spPr>
+              <a:xfrm>
+                <a:off x="713224" y="1109373"/>
+                <a:ext cx="7717500" cy="3295800"/>
+              </a:xfrm>
+              <a:prstGeom prst="rect">
+                <a:avLst/>
+              </a:prstGeom>
+            </p:spPr>
+            <p:txBody>
+              <a:bodyPr spcFirstLastPara="1" wrap="square" lIns="91425" tIns="91425" rIns="91425" bIns="91425" anchor="t" anchorCtr="0">
+                <a:noAutofit/>
+              </a:bodyPr>
+              <a:lstStyle/>
+              <a:p>
+                <a:pPr algn="just">
+                  <a:buFont typeface="Arial" panose="020B0604020202020204" pitchFamily="34" charset="0"/>
+                  <a:buChar char="•"/>
+                </a:pPr>
+                <a:r>
+                  <a:rPr lang="en-IN" b="1" dirty="0"/>
+                  <a:t>SHA-256</a:t>
+                </a:r>
+                <a:r>
+                  <a:rPr lang="en-IN" dirty="0"/>
+                  <a:t> maps any input </a:t>
+                </a:r>
+                <a14:m>
+                  <m:oMath xmlns:m="http://schemas.openxmlformats.org/officeDocument/2006/math">
+                    <m:r>
+                      <a:rPr lang="en-IN" i="1"/>
+                      <m:t>𝑚</m:t>
+                    </m:r>
+                  </m:oMath>
+                </a14:m>
+                <a:r>
+                  <a:rPr lang="en-IN" dirty="0"/>
+                  <a:t>to a fixed 256-bit value:</a:t>
+                </a:r>
+              </a:p>
+              <a:p>
+                <a:pPr marL="114300" indent="0" algn="just">
+                  <a:buNone/>
+                </a:pPr>
+                <a14:m>
+                  <m:oMathPara xmlns:m="http://schemas.openxmlformats.org/officeDocument/2006/math">
+                    <m:oMathParaPr>
+                      <m:jc m:val="centerGroup"/>
+                    </m:oMathParaPr>
+                    <m:oMath xmlns:m="http://schemas.openxmlformats.org/officeDocument/2006/math">
+                      <m:r>
+                        <a:rPr lang="en-IN" i="1"/>
+                        <m:t>h</m:t>
+                      </m:r>
+                      <m:r>
+                        <a:rPr lang="en-IN"/>
+                        <m:t>=</m:t>
+                      </m:r>
+                      <m:r>
+                        <a:rPr lang="en-IN" i="1"/>
+                        <m:t>𝐻</m:t>
+                      </m:r>
+                      <m:d>
+                        <m:dPr>
+                          <m:ctrlPr>
+                            <a:rPr lang="ar-AE" i="1"/>
+                          </m:ctrlPr>
+                        </m:dPr>
+                        <m:e>
+                          <m:r>
+                            <a:rPr lang="ar-AE" i="1"/>
+                            <m:t>𝑚</m:t>
+                          </m:r>
+                        </m:e>
+                      </m:d>
+                    </m:oMath>
+                  </m:oMathPara>
+                </a14:m>
+                <a:endParaRPr lang="ar-AE" dirty="0"/>
+              </a:p>
+              <a:p>
+                <a:pPr marL="114300" indent="0" algn="just">
+                  <a:buNone/>
+                </a:pPr>
+                <a:r>
+                  <a:rPr lang="en-IN" b="1" dirty="0"/>
+                  <a:t>Why we hash before signing</a:t>
+                </a:r>
+              </a:p>
+              <a:p>
+                <a:pPr algn="just">
+                  <a:buFont typeface="Arial" panose="020B0604020202020204" pitchFamily="34" charset="0"/>
+                  <a:buChar char="•"/>
+                </a:pPr>
+                <a:r>
+                  <a:rPr lang="en-IN" dirty="0"/>
+                  <a:t>Efficiency: Public-key signatures (like </a:t>
+                </a:r>
+                <a:r>
+                  <a:rPr lang="en-IN" dirty="0" err="1"/>
+                  <a:t>ElGamal</a:t>
+                </a:r>
+                <a:r>
+                  <a:rPr lang="en-IN" dirty="0"/>
+                  <a:t>) are expensive on large data. Hashing compresses </a:t>
+                </a:r>
+                <a14:m>
+                  <m:oMath xmlns:m="http://schemas.openxmlformats.org/officeDocument/2006/math">
+                    <m:r>
+                      <a:rPr lang="en-IN" i="1"/>
+                      <m:t>𝑚</m:t>
+                    </m:r>
+                  </m:oMath>
+                </a14:m>
+                <a:r>
+                  <a:rPr lang="en-IN" dirty="0"/>
+                  <a:t>→ fixed-size </a:t>
+                </a:r>
+                <a14:m>
+                  <m:oMath xmlns:m="http://schemas.openxmlformats.org/officeDocument/2006/math">
+                    <m:r>
+                      <a:rPr lang="en-IN" i="1"/>
+                      <m:t>h</m:t>
+                    </m:r>
+                  </m:oMath>
+                </a14:m>
+                <a:r>
+                  <a:rPr lang="en-IN" dirty="0"/>
+                  <a:t>, so we sign </a:t>
+                </a:r>
+                <a14:m>
+                  <m:oMath xmlns:m="http://schemas.openxmlformats.org/officeDocument/2006/math">
+                    <m:r>
+                      <a:rPr lang="en-IN" i="1"/>
+                      <m:t>h</m:t>
+                    </m:r>
+                  </m:oMath>
+                </a14:m>
+                <a:r>
+                  <a:rPr lang="en-IN" dirty="0"/>
+                  <a:t>instead of </a:t>
+                </a:r>
+                <a14:m>
+                  <m:oMath xmlns:m="http://schemas.openxmlformats.org/officeDocument/2006/math">
+                    <m:r>
+                      <a:rPr lang="en-IN" i="1"/>
+                      <m:t>𝑚</m:t>
+                    </m:r>
+                  </m:oMath>
+                </a14:m>
+                <a:r>
+                  <a:rPr lang="en-IN" dirty="0"/>
+                  <a:t>. </a:t>
+                </a:r>
+              </a:p>
+              <a:p>
+                <a:pPr algn="just">
+                  <a:buFont typeface="Arial" panose="020B0604020202020204" pitchFamily="34" charset="0"/>
+                  <a:buChar char="•"/>
+                </a:pPr>
+                <a:r>
+                  <a:rPr lang="en-IN" dirty="0"/>
+                  <a:t>Security binding: The signature is effectively on the </a:t>
+                </a:r>
+                <a:r>
+                  <a:rPr lang="en-IN" i="1" dirty="0"/>
+                  <a:t>entire message</a:t>
+                </a:r>
+                <a:r>
+                  <a:rPr lang="en-IN" dirty="0"/>
+                  <a:t>, because any change in </a:t>
+                </a:r>
+                <a14:m>
+                  <m:oMath xmlns:m="http://schemas.openxmlformats.org/officeDocument/2006/math">
+                    <m:r>
+                      <a:rPr lang="en-IN" i="1"/>
+                      <m:t>𝑚</m:t>
+                    </m:r>
+                  </m:oMath>
+                </a14:m>
+                <a:r>
+                  <a:rPr lang="en-IN" dirty="0"/>
+                  <a:t>changes </a:t>
+                </a:r>
+                <a14:m>
+                  <m:oMath xmlns:m="http://schemas.openxmlformats.org/officeDocument/2006/math">
+                    <m:r>
+                      <a:rPr lang="en-IN" i="1"/>
+                      <m:t>h</m:t>
+                    </m:r>
+                  </m:oMath>
+                </a14:m>
+                <a:r>
+                  <a:rPr lang="en-IN" dirty="0"/>
+                  <a:t>. </a:t>
+                </a:r>
+              </a:p>
+              <a:p>
+                <a:pPr marL="114300" indent="0" algn="just">
+                  <a:buNone/>
+                </a:pPr>
+                <a:endParaRPr lang="en-IN" dirty="0"/>
+              </a:p>
+              <a:p>
+                <a:pPr marL="114300" indent="0" algn="just">
+                  <a:buNone/>
+                </a:pPr>
+                <a:r>
+                  <a:rPr lang="en-IN" b="1" dirty="0"/>
+                  <a:t>Core security properties used</a:t>
+                </a:r>
+              </a:p>
+              <a:p>
+                <a:pPr algn="just">
+                  <a:buFont typeface="Arial" panose="020B0604020202020204" pitchFamily="34" charset="0"/>
+                  <a:buChar char="•"/>
+                </a:pPr>
+                <a:r>
+                  <a:rPr lang="en-IN" dirty="0"/>
+                  <a:t>Preimage resistance: Given </a:t>
+                </a:r>
+                <a14:m>
+                  <m:oMath xmlns:m="http://schemas.openxmlformats.org/officeDocument/2006/math">
+                    <m:r>
+                      <a:rPr lang="en-IN" i="1"/>
+                      <m:t>h</m:t>
+                    </m:r>
+                  </m:oMath>
+                </a14:m>
+                <a:r>
+                  <a:rPr lang="en-IN" dirty="0"/>
+                  <a:t>, infeasible to find </a:t>
+                </a:r>
+                <a14:m>
+                  <m:oMath xmlns:m="http://schemas.openxmlformats.org/officeDocument/2006/math">
+                    <m:r>
+                      <a:rPr lang="en-IN" i="1"/>
+                      <m:t>𝑚</m:t>
+                    </m:r>
+                  </m:oMath>
+                </a14:m>
+                <a:r>
+                  <a:rPr lang="en-IN" dirty="0"/>
+                  <a:t>. </a:t>
+                </a:r>
+              </a:p>
+              <a:p>
+                <a:pPr algn="just">
+                  <a:buFont typeface="Arial" panose="020B0604020202020204" pitchFamily="34" charset="0"/>
+                  <a:buChar char="•"/>
+                </a:pPr>
+                <a:r>
+                  <a:rPr lang="en-IN" dirty="0"/>
+                  <a:t>Second-preimage resistance: Given </a:t>
+                </a:r>
+                <a14:m>
+                  <m:oMath xmlns:m="http://schemas.openxmlformats.org/officeDocument/2006/math">
+                    <m:r>
+                      <a:rPr lang="en-IN" i="1"/>
+                      <m:t>𝑚</m:t>
+                    </m:r>
+                  </m:oMath>
+                </a14:m>
+                <a:r>
+                  <a:rPr lang="en-IN" dirty="0"/>
+                  <a:t>, hard to find </a:t>
+                </a:r>
+                <a14:m>
+                  <m:oMath xmlns:m="http://schemas.openxmlformats.org/officeDocument/2006/math">
+                    <m:sSup>
+                      <m:sSupPr>
+                        <m:ctrlPr>
+                          <a:rPr lang="ar-AE"/>
+                        </m:ctrlPr>
+                      </m:sSupPr>
+                      <m:e>
+                        <m:r>
+                          <a:rPr lang="ar-AE" i="1"/>
+                          <m:t>𝑚</m:t>
+                        </m:r>
+                      </m:e>
+                      <m:sup>
+                        <m:r>
+                          <a:rPr lang="ar-AE"/>
+                          <m:t>′</m:t>
+                        </m:r>
+                      </m:sup>
+                    </m:sSup>
+                    <m:r>
+                      <a:rPr lang="ar-AE"/>
+                      <m:t>≠</m:t>
+                    </m:r>
+                    <m:r>
+                      <a:rPr lang="ar-AE" i="1"/>
+                      <m:t>𝑚</m:t>
+                    </m:r>
+                  </m:oMath>
+                </a14:m>
+                <a:r>
+                  <a:rPr lang="en-IN" dirty="0"/>
+                  <a:t>with same hash. </a:t>
+                </a:r>
+              </a:p>
+              <a:p>
+                <a:pPr algn="just">
+                  <a:buFont typeface="Arial" panose="020B0604020202020204" pitchFamily="34" charset="0"/>
+                  <a:buChar char="•"/>
+                </a:pPr>
+                <a:r>
+                  <a:rPr lang="en-IN" dirty="0"/>
+                  <a:t>Collision resistance: Hard to find any two </a:t>
+                </a:r>
+                <a14:m>
+                  <m:oMath xmlns:m="http://schemas.openxmlformats.org/officeDocument/2006/math">
+                    <m:sSub>
+                      <m:sSubPr>
+                        <m:ctrlPr>
+                          <a:rPr lang="ar-AE"/>
+                        </m:ctrlPr>
+                      </m:sSubPr>
+                      <m:e>
+                        <m:r>
+                          <a:rPr lang="ar-AE" i="1"/>
+                          <m:t>𝑚</m:t>
+                        </m:r>
+                      </m:e>
+                      <m:sub>
+                        <m:r>
+                          <a:rPr lang="ar-AE"/>
+                          <m:t>1</m:t>
+                        </m:r>
+                      </m:sub>
+                    </m:sSub>
+                    <m:r>
+                      <a:rPr lang="ar-AE"/>
+                      <m:t>,</m:t>
+                    </m:r>
+                    <m:sSub>
+                      <m:sSubPr>
+                        <m:ctrlPr>
+                          <a:rPr lang="ar-AE" i="1"/>
+                        </m:ctrlPr>
+                      </m:sSubPr>
+                      <m:e>
+                        <m:r>
+                          <a:rPr lang="ar-AE" i="1"/>
+                          <m:t>𝑚</m:t>
+                        </m:r>
+                      </m:e>
+                      <m:sub>
+                        <m:r>
+                          <a:rPr lang="ar-AE"/>
+                          <m:t>2</m:t>
+                        </m:r>
+                      </m:sub>
+                    </m:sSub>
+                  </m:oMath>
+                </a14:m>
+                <a:r>
+                  <a:rPr lang="en-IN" dirty="0"/>
+                  <a:t>with </a:t>
+                </a:r>
+                <a14:m>
+                  <m:oMath xmlns:m="http://schemas.openxmlformats.org/officeDocument/2006/math">
+                    <m:r>
+                      <a:rPr lang="en-IN" i="1"/>
+                      <m:t>𝐻</m:t>
+                    </m:r>
+                    <m:d>
+                      <m:dPr>
+                        <m:ctrlPr>
+                          <a:rPr lang="ar-AE" i="1"/>
+                        </m:ctrlPr>
+                      </m:dPr>
+                      <m:e>
+                        <m:sSub>
+                          <m:sSubPr>
+                            <m:ctrlPr>
+                              <a:rPr lang="ar-AE" i="1"/>
+                            </m:ctrlPr>
+                          </m:sSubPr>
+                          <m:e>
+                            <m:r>
+                              <a:rPr lang="ar-AE" i="1"/>
+                              <m:t>𝑚</m:t>
+                            </m:r>
+                          </m:e>
+                          <m:sub>
+                            <m:r>
+                              <a:rPr lang="ar-AE"/>
+                              <m:t>1</m:t>
+                            </m:r>
+                          </m:sub>
+                        </m:sSub>
+                      </m:e>
+                    </m:d>
+                    <m:r>
+                      <a:rPr lang="ar-AE"/>
+                      <m:t>=</m:t>
+                    </m:r>
+                    <m:r>
+                      <a:rPr lang="ar-AE" i="1"/>
+                      <m:t>𝐻</m:t>
+                    </m:r>
+                    <m:d>
+                      <m:dPr>
+                        <m:ctrlPr>
+                          <a:rPr lang="ar-AE" i="1"/>
+                        </m:ctrlPr>
+                      </m:dPr>
+                      <m:e>
+                        <m:sSub>
+                          <m:sSubPr>
+                            <m:ctrlPr>
+                              <a:rPr lang="ar-AE" i="1"/>
+                            </m:ctrlPr>
+                          </m:sSubPr>
+                          <m:e>
+                            <m:r>
+                              <a:rPr lang="ar-AE" i="1"/>
+                              <m:t>𝑚</m:t>
+                            </m:r>
+                          </m:e>
+                          <m:sub>
+                            <m:r>
+                              <a:rPr lang="ar-AE"/>
+                              <m:t>2</m:t>
+                            </m:r>
+                          </m:sub>
+                        </m:sSub>
+                      </m:e>
+                    </m:d>
+                  </m:oMath>
+                </a14:m>
+                <a:r>
+                  <a:rPr lang="ar-AE" dirty="0"/>
+                  <a:t>. </a:t>
+                </a:r>
+              </a:p>
+              <a:p>
+                <a:pPr marL="114300" indent="0" algn="just">
+                  <a:buNone/>
+                </a:pPr>
+                <a:r>
+                  <a:rPr lang="en-IN" dirty="0"/>
+                  <a:t>These ensure an attacker can’t modify data without invalidating the signature.</a:t>
+                </a:r>
+              </a:p>
+              <a:p>
+                <a:pPr marL="114300" indent="0" algn="just">
+                  <a:buNone/>
+                </a:pPr>
+                <a:endParaRPr lang="en-IN" dirty="0"/>
+              </a:p>
+              <a:p>
+                <a:pPr marL="114300" indent="0" algn="just">
+                  <a:buNone/>
+                </a:pPr>
+                <a:r>
+                  <a:rPr lang="en-IN" b="1" dirty="0"/>
+                  <a:t>In Diffie–Hellman (MITM protection)</a:t>
+                </a:r>
+              </a:p>
+              <a:p>
+                <a:pPr algn="just">
+                  <a:buFont typeface="Arial" panose="020B0604020202020204" pitchFamily="34" charset="0"/>
+                  <a:buChar char="•"/>
+                </a:pPr>
+                <a:r>
+                  <a:rPr lang="en-IN" dirty="0"/>
+                  <a:t>Instead of signing raw values, parties sign a hash of all relevant context:</a:t>
+                </a:r>
+              </a:p>
+              <a:p>
+                <a:pPr marL="114300" indent="0" algn="just">
+                  <a:buNone/>
+                </a:pPr>
+                <a14:m>
+                  <m:oMathPara xmlns:m="http://schemas.openxmlformats.org/officeDocument/2006/math">
+                    <m:oMathParaPr>
+                      <m:jc m:val="centerGroup"/>
+                    </m:oMathParaPr>
+                    <m:oMath xmlns:m="http://schemas.openxmlformats.org/officeDocument/2006/math">
+                      <m:r>
+                        <a:rPr lang="en-IN" i="1"/>
+                        <m:t>h</m:t>
+                      </m:r>
+                      <m:r>
+                        <a:rPr lang="en-IN"/>
+                        <m:t>=</m:t>
+                      </m:r>
+                      <m:r>
+                        <a:rPr lang="en-IN" i="1"/>
+                        <m:t>𝐻</m:t>
+                      </m:r>
+                      <m:d>
+                        <m:dPr>
+                          <m:ctrlPr>
+                            <a:rPr lang="ar-AE" i="1"/>
+                          </m:ctrlPr>
+                        </m:dPr>
+                        <m:e>
+                          <m:sSup>
+                            <m:sSupPr>
+                              <m:ctrlPr>
+                                <a:rPr lang="ar-AE" i="1"/>
+                              </m:ctrlPr>
+                            </m:sSupPr>
+                            <m:e>
+                              <m:r>
+                                <a:rPr lang="ar-AE" i="1"/>
+                                <m:t>𝑔</m:t>
+                              </m:r>
+                            </m:e>
+                            <m:sup>
+                              <m:r>
+                                <a:rPr lang="ar-AE" i="1"/>
+                                <m:t>𝑎</m:t>
+                              </m:r>
+                            </m:sup>
+                          </m:sSup>
+                          <m:r>
+                            <a:rPr lang="ar-AE"/>
+                            <m:t>∥</m:t>
+                          </m:r>
+                          <m:sSup>
+                            <m:sSupPr>
+                              <m:ctrlPr>
+                                <a:rPr lang="ar-AE" i="1"/>
+                              </m:ctrlPr>
+                            </m:sSupPr>
+                            <m:e>
+                              <m:r>
+                                <a:rPr lang="ar-AE" i="1"/>
+                                <m:t>𝑔</m:t>
+                              </m:r>
+                            </m:e>
+                            <m:sup>
+                              <m:r>
+                                <a:rPr lang="ar-AE" i="1"/>
+                                <m:t>𝑏</m:t>
+                              </m:r>
+                            </m:sup>
+                          </m:sSup>
+                          <m:r>
+                            <a:rPr lang="ar-AE"/>
+                            <m:t>∥</m:t>
+                          </m:r>
+                          <m:r>
+                            <m:rPr>
+                              <m:nor/>
+                            </m:rPr>
+                            <a:rPr lang="en-IN" i="1"/>
+                            <m:t>identities</m:t>
+                          </m:r>
+                        </m:e>
+                      </m:d>
+                    </m:oMath>
+                  </m:oMathPara>
+                </a14:m>
+                <a:endParaRPr lang="ar-AE" dirty="0"/>
+              </a:p>
+              <a:p>
+                <a:pPr algn="just">
+                  <a:buFont typeface="Arial" panose="020B0604020202020204" pitchFamily="34" charset="0"/>
+                  <a:buChar char="•"/>
+                </a:pPr>
+                <a:r>
+                  <a:rPr lang="en-IN" dirty="0"/>
+                  <a:t>So, hashing + signing turns unauthenticated DH into an </a:t>
+                </a:r>
+                <a:r>
+                  <a:rPr lang="en-IN" b="1" dirty="0"/>
+                  <a:t>authenticated key exchange</a:t>
+                </a:r>
+                <a:r>
+                  <a:rPr lang="en-IN" dirty="0"/>
+                  <a:t>, blocking MITM who tries to substitute public values.</a:t>
+                </a:r>
+              </a:p>
+            </p:txBody>
+          </p:sp>
+        </mc:Choice>
+        <mc:Fallback>
+          <p:sp>
+            <p:nvSpPr>
+              <p:cNvPr id="495" name="Google Shape;495;p61">
+                <a:extLst>
+                  <a:ext uri="{FF2B5EF4-FFF2-40B4-BE49-F238E27FC236}">
+                    <a16:creationId xmlns:a16="http://schemas.microsoft.com/office/drawing/2014/main" id="{E583D7FD-7BC1-F3BF-6154-039EAB421DDF}"/>
+                  </a:ext>
+                </a:extLst>
+              </p:cNvPr>
+              <p:cNvSpPr txBox="1">
+                <a:spLocks noGrp="1" noRot="1" noChangeAspect="1" noMove="1" noResize="1" noEditPoints="1" noAdjustHandles="1" noChangeArrowheads="1" noChangeShapeType="1" noTextEdit="1"/>
+              </p:cNvSpPr>
+              <p:nvPr>
+                <p:ph type="body" idx="1"/>
+              </p:nvPr>
+            </p:nvSpPr>
+            <p:spPr>
+              <a:xfrm>
+                <a:off x="713224" y="1109373"/>
+                <a:ext cx="7717500" cy="3295800"/>
+              </a:xfrm>
+              <a:prstGeom prst="rect">
+                <a:avLst/>
+              </a:prstGeom>
+              <a:blipFill>
+                <a:blip r:embed="rId3"/>
+                <a:stretch>
+                  <a:fillRect t="-1479" b="-2957"/>
+                </a:stretch>
+              </a:blipFill>
+            </p:spPr>
+            <p:txBody>
+              <a:bodyPr/>
+              <a:lstStyle/>
+              <a:p>
+                <a:r>
+                  <a:rPr lang="en-IN">
+                    <a:noFill/>
+                  </a:rPr>
+                  <a:t> </a:t>
+                </a:r>
+              </a:p>
+            </p:txBody>
+          </p:sp>
+        </mc:Fallback>
+      </mc:AlternateContent>
+    </p:spTree>
+    <p:extLst>
+      <p:ext uri="{BB962C8B-B14F-4D97-AF65-F5344CB8AC3E}">
+        <p14:creationId xmlns:p14="http://schemas.microsoft.com/office/powerpoint/2010/main" val="3891510976"/>
+      </p:ext>
+    </p:extLst>
+  </p:cSld>
+  <p:clrMapOvr>
+    <a:masterClrMapping/>
+  </p:clrMapOvr>
 </p:sld>
 </file>
 
